--- a/it/slides/05-Architettura_dei_Calcolatori-Rappresentazione_dei_Numeri_Interi-Codice.pptx
+++ b/it/slides/05-Architettura_dei_Calcolatori-Rappresentazione_dei_Numeri_Interi-Codice.pptx
@@ -126,24 +126,36 @@
   <p:extLst>
     <p:ext uri="{521415D9-36F7-43E2-AB2F-B90AF26B5E84}">
       <p14:sectionLst xmlns:p14="http://schemas.microsoft.com/office/powerpoint/2010/main">
-        <p14:section name="Apertura" id="{c6c71f71-5366-97ff-d72d-7e4a1773d7a1}">
+        <p14:section name="Apertura" id="{d1c31745-9fa9-26d4-b3fb-b2847ea7f9fa}">
           <p14:sldIdLst>
             <p14:sldId id="256"/>
             <p14:sldId id="257"/>
           </p14:sldIdLst>
         </p14:section>
-        <p14:section name="I listati" id="{a4633c4e-20b8-cff4-07ca-cf30647e059d}">
+        <p14:section name="Riscaldamento sulla macchina" id="{9333450f-76d1-f6fc-8cac-cd46b6e1550a}">
           <p14:sldIdLst>
             <p14:sldId id="258"/>
+          </p14:sldIdLst>
+        </p14:section>
+        <p14:section name="Numeri naturali e overflow" id="{1c713062-7699-ca8a-0f1d-0418dcbc42fc}">
+          <p14:sldIdLst>
             <p14:sldId id="259"/>
+          </p14:sldIdLst>
+        </p14:section>
+        <p14:section name="Interi con segno" id="{96c8ca9f-64c1-73e7-0b59-8b8f56c91802}">
+          <p14:sldIdLst>
             <p14:sldId id="260"/>
+          </p14:sldIdLst>
+        </p14:section>
+        <p14:section name="Ritorno alla macchina" id="{43f8da0f-85c1-95ce-71d6-cd6b8c4ea220}">
+          <p14:sldIdLst>
             <p14:sldId id="261"/>
             <p14:sldId id="262"/>
             <p14:sldId id="263"/>
             <p14:sldId id="264"/>
           </p14:sldIdLst>
         </p14:section>
-        <p14:section name="Il programma completo" id="{8c59247e-956f-fd57-f63b-096b78ba14ee}">
+        <p14:section name="Il programma completo" id="{19bd16b7-04ac-3574-eecd-88d2c3cdc7d4}">
           <p14:sldIdLst>
             <p14:sldId id="265"/>
             <p14:sldId id="266"/>
@@ -152,7 +164,7 @@
             <p14:sldId id="269"/>
           </p14:sldIdLst>
         </p14:section>
-        <p14:section name="Eseguire e provare" id="{d1077c94-8c98-ea71-65c3-57d698301fbd}">
+        <p14:section name="Eseguire e provare" id="{b2c786da-b6f6-2b87-4ed0-a0ba998bacd4}">
           <p14:sldIdLst>
             <p14:sldId id="270"/>
             <p14:sldId id="271"/>
@@ -161,7 +173,7 @@
             <p14:sldId id="274"/>
           </p14:sldIdLst>
         </p14:section>
-        <p14:section name="Esercizi" id="{ff58fa15-11f1-5260-a292-c1691725c80b}">
+        <p14:section name="Esercizi" id="{2ace0bb7-eea5-bdef-974e-b8ec2593a703}">
           <p14:sldIdLst>
             <p14:sldId id="275"/>
           </p14:sldIdLst>
@@ -3235,7 +3247,63 @@
       </p:sp>
       <p:sp>
         <p:nvSpPr>
-          <p:cNvPr id="11" name="Shape 9"/>
+          <p:cNvPr id="11" name="Text 9"/>
+          <p:cNvSpPr txBox="1"/>
+          <p:nvPr/>
+        </p:nvSpPr>
+        <p:spPr>
+          <a:xfrm>
+            <a:off x="4693615" y="566928"/>
+            <a:ext cx="6949440" cy="640080"/>
+          </a:xfrm>
+          <a:prstGeom prst="rect">
+            <a:avLst/>
+          </a:prstGeom>
+          <a:noFill/>
+          <a:ln/>
+        </p:spPr>
+        <p:txBody>
+          <a:bodyPr wrap="square" lIns="0" tIns="0" rIns="0" bIns="0" rtlCol="0" anchor="t"/>
+          <a:lstStyle/>
+          <a:p>
+            <a:pPr algn="r" indent="0" marL="0">
+              <a:buNone/>
+            </a:pPr>
+            <a:r>
+              <a:rPr lang="en-US" sz="1300" dirty="0">
+                <a:solidFill>
+                  <a:srgbClr val="CFE3EA"/>
+                </a:solidFill>
+                <a:latin typeface="Calibri" pitchFamily="34" charset="0"/>
+                <a:ea typeface="Calibri" pitchFamily="34" charset="-122"/>
+                <a:cs typeface="Calibri" pitchFamily="34" charset="-120"/>
+              </a:rPr>
+              <a:t>Presentazione del codice. I concetti, le figure e le domande sono nella presentazione della lezione:</a:t>
+            </a:r>
+            <a:endParaRPr lang="en-US" sz="1300" dirty="0"/>
+          </a:p>
+          <a:p>
+            <a:pPr algn="r" indent="0" marL="0">
+              <a:buNone/>
+            </a:pPr>
+            <a:r>
+              <a:rPr lang="en-US" sz="1300" dirty="0">
+                <a:solidFill>
+                  <a:srgbClr val="CFE3EA"/>
+                </a:solidFill>
+                <a:latin typeface="Calibri" pitchFamily="34" charset="0"/>
+                <a:ea typeface="Calibri" pitchFamily="34" charset="-122"/>
+                <a:cs typeface="Calibri" pitchFamily="34" charset="-120"/>
+              </a:rPr>
+              <a:t>05-Architettura_dei_Calcolatori-Rappresentazione_dei_Numeri_Interi.pptx</a:t>
+            </a:r>
+            <a:endParaRPr lang="en-US" sz="1300" dirty="0"/>
+          </a:p>
+        </p:txBody>
+      </p:sp>
+      <p:sp>
+        <p:nvSpPr>
+          <p:cNvPr id="12" name="Shape 10"/>
           <p:cNvSpPr/>
           <p:nvPr/>
         </p:nvSpPr>
@@ -3262,7 +3330,7 @@
       </p:sp>
       <p:pic>
         <p:nvPicPr>
-          <p:cNvPr id="12" name="Image 0" descr="/Users/raffaelemontella/devel/riscv-prg32/computer-architecture-with-prg32/tools/assets/lab2_step2_move.png">    </p:cNvPr>
+          <p:cNvPr id="13" name="Image 0" descr="/Users/raffaelemontella/devel/riscv-prg32/computer-architecture-with-prg32/tools/assets/lab2_step2_move.png">    </p:cNvPr>
           <p:cNvPicPr>
             <a:picLocks noChangeAspect="1"/>
           </p:cNvPicPr>

--- a/it/slides/05-Architettura_dei_Calcolatori-Rappresentazione_dei_Numeri_Interi-Codice.pptx
+++ b/it/slides/05-Architettura_dei_Calcolatori-Rappresentazione_dei_Numeri_Interi-Codice.pptx
@@ -126,28 +126,28 @@
   <p:extLst>
     <p:ext uri="{521415D9-36F7-43E2-AB2F-B90AF26B5E84}">
       <p14:sectionLst xmlns:p14="http://schemas.microsoft.com/office/powerpoint/2010/main">
-        <p14:section name="Apertura" id="{d1c31745-9fa9-26d4-b3fb-b2847ea7f9fa}">
+        <p14:section name="Apertura" id="{f9a8431e-e272-1d88-40b1-455df3bf65e2}">
           <p14:sldIdLst>
             <p14:sldId id="256"/>
             <p14:sldId id="257"/>
           </p14:sldIdLst>
         </p14:section>
-        <p14:section name="Riscaldamento sulla macchina" id="{9333450f-76d1-f6fc-8cac-cd46b6e1550a}">
+        <p14:section name="Riscaldamento sulla macchina" id="{405a7f0f-8476-9734-1b16-0459837ab76c}">
           <p14:sldIdLst>
             <p14:sldId id="258"/>
           </p14:sldIdLst>
         </p14:section>
-        <p14:section name="Numeri naturali e overflow" id="{1c713062-7699-ca8a-0f1d-0418dcbc42fc}">
+        <p14:section name="Numeri naturali e overflow" id="{5f564b1c-20b3-ceed-e4ec-dc6c0e0ca142}">
           <p14:sldIdLst>
             <p14:sldId id="259"/>
           </p14:sldIdLst>
         </p14:section>
-        <p14:section name="Interi con segno" id="{96c8ca9f-64c1-73e7-0b59-8b8f56c91802}">
+        <p14:section name="Interi con segno" id="{8afade24-b7a0-b86a-0cae-015ffb45cd14}">
           <p14:sldIdLst>
             <p14:sldId id="260"/>
           </p14:sldIdLst>
         </p14:section>
-        <p14:section name="Ritorno alla macchina" id="{43f8da0f-85c1-95ce-71d6-cd6b8c4ea220}">
+        <p14:section name="Ritorno alla macchina" id="{78d89fcf-0c55-a55e-24a3-99b2e3ad87a8}">
           <p14:sldIdLst>
             <p14:sldId id="261"/>
             <p14:sldId id="262"/>
@@ -155,7 +155,7 @@
             <p14:sldId id="264"/>
           </p14:sldIdLst>
         </p14:section>
-        <p14:section name="Il programma completo" id="{19bd16b7-04ac-3574-eecd-88d2c3cdc7d4}">
+        <p14:section name="Il programma completo" id="{83793939-ad20-d931-557d-cf736fbdc9fb}">
           <p14:sldIdLst>
             <p14:sldId id="265"/>
             <p14:sldId id="266"/>
@@ -164,7 +164,7 @@
             <p14:sldId id="269"/>
           </p14:sldIdLst>
         </p14:section>
-        <p14:section name="Eseguire e provare" id="{b2c786da-b6f6-2b87-4ed0-a0ba998bacd4}">
+        <p14:section name="Eseguire e provare" id="{40841137-4b6b-b083-1f7a-a15db861fe8e}">
           <p14:sldIdLst>
             <p14:sldId id="270"/>
             <p14:sldId id="271"/>
@@ -173,7 +173,7 @@
             <p14:sldId id="274"/>
           </p14:sldIdLst>
         </p14:section>
-        <p14:section name="Esercizi" id="{2ace0bb7-eea5-bdef-974e-b8ec2593a703}">
+        <p14:section name="Esercizi" id="{3b0d7e67-5a22-48cc-11c4-cb5cbfab4712}">
           <p14:sldIdLst>
             <p14:sldId id="275"/>
           </p14:sldIdLst>
@@ -582,7 +582,9 @@
           <a:p>
             <a:r>
               <a:rPr lang="en-US" dirty="0"/>
-              <a:t>Questa è la presentazione del codice della Lezione 05. La presentazione della lezione contiene i concetti; questa contiene tutto ciò che si scrive e si esegue: i listati con la loro spiegazione, il programma completo, che cosa mostra, e il modo di provarlo su ciascuno dei tre host.</a:t>
+              <a:t>Questa è la presentazione del codice della Lezione 05. La presentazione della lezione contiene i concetti; questa contiene tutto ciò che si scrive e si esegue: i listati con la loro spiegazione, il programma completo, che cosa mostra, e il modo di provarlo su ciascuno dei tre host.
+Stato di apprendimento: DA COMPRENDERE OGGI, alla fine di questa lezione lo spiegate, lo seguite passo passo e lo applicate da soli; DA UTILIZZARE OGGI, oggi seguite e usate la ricetta; come funziona dentro si spiega più avanti, o non fa parte del corso; DA COMPRENDERE PIÙ AVANTI, riconoscete il nome e lo scopo; lo spiega una lezione successiva. Una slide senza etichetta è contesto: una storia, un esempio, una domanda, un esercizio.
+Stato di apprendimento di questa lezione. DA COMPRENDERE OGGI: il complemento a due; i cambi di base; naturali e overflow; shift come moltiplicazione; segno e modulo; istruzioni con o senza segno; l'estensione del segno. DA UTILIZZARE OGGI: le chiamate del runtime PRG32, il programma completo, gli strumenti di PRG32 (si usa, non si studia, in questo corso). DA COMPRENDERE PIÙ AVANTI: niente. Una slide senza etichetta è contesto: una storia, un esempio, una domanda, un esercizio.</a:t>
             </a:r>
             <a:endParaRPr lang="en-US" dirty="0"/>
           </a:p>
@@ -671,6 +673,7 @@
             <a:r>
               <a:rPr lang="en-US" dirty="0"/>
               <a:t>Una pagina del programma completo, esattamente com'è nel repository. Leggetelo dall'inizio: l'intestazione dice che cosa mostra il programma e come compilarlo; seguono le tre funzioni init, update e draw, poi i dati. Le righe incontrate nei listati della lezione hanno qui gli stessi commenti.
+DA UTILIZZARE OGGI: il programma completo (si usa, non si studia, in questo corso).
 Per il docente: code/l05.S, come viene compilato ed eseguito dai test. I commenti fanno parte del programma, e sono in inglese come in tutti i listati: leggeteli con il codice.</a:t>
             </a:r>
             <a:endParaRPr lang="en-US" dirty="0"/>
@@ -760,6 +763,7 @@
             <a:r>
               <a:rPr lang="en-US" dirty="0"/>
               <a:t>Una pagina del programma completo, esattamente com'è nel repository. Leggetelo dall'inizio: l'intestazione dice che cosa mostra il programma e come compilarlo; seguono le tre funzioni init, update e draw, poi i dati. Le righe incontrate nei listati della lezione hanno qui gli stessi commenti.
+DA UTILIZZARE OGGI: il programma completo (si usa, non si studia, in questo corso).
 Per il docente: code/l05.S, come viene compilato ed eseguito dai test. I commenti fanno parte del programma, e sono in inglese come in tutti i listati: leggeteli con il codice.</a:t>
             </a:r>
             <a:endParaRPr lang="en-US" dirty="0"/>
@@ -849,6 +853,7 @@
             <a:r>
               <a:rPr lang="en-US" dirty="0"/>
               <a:t>Una pagina del programma completo, esattamente com'è nel repository. Leggetelo dall'inizio: l'intestazione dice che cosa mostra il programma e come compilarlo; seguono le tre funzioni init, update e draw, poi i dati. Le righe incontrate nei listati della lezione hanno qui gli stessi commenti.
+DA UTILIZZARE OGGI: il programma completo (si usa, non si studia, in questo corso).
 Per il docente: code/l05.S, come viene compilato ed eseguito dai test. I commenti fanno parte del programma, e sono in inglese come in tutti i listati: leggeteli con il codice.</a:t>
             </a:r>
             <a:endParaRPr lang="en-US" dirty="0"/>
@@ -938,6 +943,7 @@
             <a:r>
               <a:rPr lang="en-US" dirty="0"/>
               <a:t>Una pagina del programma completo, esattamente com'è nel repository. Leggetelo dall'inizio: l'intestazione dice che cosa mostra il programma e come compilarlo; seguono le tre funzioni init, update e draw, poi i dati. Le righe incontrate nei listati della lezione hanno qui gli stessi commenti.
+DA UTILIZZARE OGGI: il programma completo (si usa, non si studia, in questo corso).
 Per il docente: code/l05.S, come viene compilato ed eseguito dai test. I commenti fanno parte del programma, e sono in inglese come in tutti i listati: leggeteli con il codice.</a:t>
             </a:r>
             <a:endParaRPr lang="en-US" dirty="0"/>
@@ -1027,6 +1033,7 @@
             <a:r>
               <a:rPr lang="en-US" dirty="0"/>
               <a:t>Una pagina del programma completo, esattamente com'è nel repository. Leggetelo dall'inizio: l'intestazione dice che cosa mostra il programma e come compilarlo; seguono le tre funzioni init, update e draw, poi i dati. Le righe incontrate nei listati della lezione hanno qui gli stessi commenti.
+DA UTILIZZARE OGGI: il programma completo (si usa, non si studia, in questo corso).
 Per il docente: code/l05.S, come viene compilato ed eseguito dai test. I commenti fanno parte del programma, e sono in inglese come in tutti i listati: leggeteli con il codice.</a:t>
             </a:r>
             <a:endParaRPr lang="en-US" dirty="0"/>
@@ -1205,6 +1212,7 @@
             <a:r>
               <a:rPr lang="en-US" dirty="0"/>
               <a:t>La via più rapida: PRG32-QT sul vostro computer. Quattro passi, ciascuno con il suo comando. PRG32-QT si comporta come una scheda sulla porta 8080, ed è per questo che il comando di caricamento dice esp32c6. Con la modalità debug abilitata potete fermarvi su qualsiasi istruzione e leggere registri e memoria.
+DA UTILIZZARE OGGI: gli strumenti di PRG32 (si usa, non si studia, in questo corso).
 Per il docente: Eseguito dai test: la cartuccia di questa slide è compilata con questo comando ed eseguita sull'esecutore senza interfaccia di PRG32-QT. Senza la toolchain: importate il file .prg32 in PRG32-QT e scegliete Run Cartridge. Tasti: frecce o WASD per il joystick, Z o J per A, X o K per B, Invio per Start, Esc per tornare a Setup.</a:t>
             </a:r>
             <a:endParaRPr lang="en-US" dirty="0"/>
@@ -1294,6 +1302,7 @@
             <a:r>
               <a:rPr lang="en-US" dirty="0"/>
               <a:t>Lo stesso programma sull'emulatore. QEMU esegue il firmware vero su un chip emulato, quindi la cartuccia va compilata per l'architettura qemu. Caricate la cartuccia mentre QEMU è chiuso. Il firmware si apre sul menu Setup: scegliete Run Cartridge e lo slot. Ricordate che la tastiera è letta dal terminale, non dalla finestra con l'immagine.
+DA UTILIZZARE OGGI: gli strumenti di PRG32 (si usa, non si studia, in questo corso).
 Per il docente: Verificato dai test fino al caricamento: la cartuccia è compilata per l'architettura qemu e accettata nell'immagine flash dell'emulatore. Ciò che l'emulatore poi mostra non è verificato automaticamente: il QEMU di Espressif ha bisogno della sua finestra. Dall'ottobre 2026 il firmware parte da Setup: scegliete Run Cartridge, poi cart0.</a:t>
             </a:r>
             <a:endParaRPr lang="en-US" dirty="0"/>
@@ -1383,6 +1392,7 @@
             <a:r>
               <a:rPr lang="en-US" dirty="0"/>
               <a:t>Lo stesso programma sul kit. Il firmware si scrive una volta, via USB; dopo, le cartucce viaggiano sul Wi-Fi. Il comando di caricamento è quello usato per PRG32-QT con l'indirizzo della scheda. È l'unico host che i test automatici non eseguono: provatelo, e riferite ciò che vedete.
+DA UTILIZZARE OGGI: gli strumenti di PRG32 (si usa, non si studia, in questo corso).
 Per il docente: Non eseguito dai test: sulla macchina di prova non c'è una scheda. La cartuccia per l'architettura esp32c6 è compilata dai test; i passi sono quelli della documentazione di PRG32. Se la porta seriale non viene trovata, passatela esplicitamente. Per usare il Wi-Fi dell'aula: python3 -m prg32 wifi set --ssid NOME --password PASSWORD --mode sta.</a:t>
             </a:r>
             <a:endParaRPr lang="en-US" dirty="0"/>
@@ -1472,6 +1482,7 @@
             <a:r>
               <a:rPr lang="en-US" dirty="0"/>
               <a:t>I cinque sintomi più comuni, che cosa significa ciascuno, e che cosa fare. Leggete il messaggio prima di cambiare qualcosa: quasi sempre nomina la causa.
+DA UTILIZZARE OGGI: gli strumenti di PRG32 (si usa, non si studia, in questo corso).
 Per il docente: Le prime tre righe coprono la maggior parte dei casi. Quando chiedete aiuto, incollate il comando e l'intero messaggio come testo. docs/usage/troubleshooting.md del repository di PRG32 ha l'elenco completo.</a:t>
             </a:r>
             <a:endParaRPr lang="en-US" dirty="0"/>
@@ -1739,6 +1750,7 @@
             <a:r>
               <a:rPr lang="en-US" dirty="0"/>
               <a:t>Il codice legge i pulsanti, carica marker_x dalla memoria, sottrae 1 se LEFT è premuto e riscrive il valore: il load, modify, store della Lezione 02. Tenete premuto LEFT e il valore stampato fa 00000002, 00000001, 00000000, e poi FFFFFFFF. È un bug? FFFFFFFF è il numero 4.294.967.295, oppure è meno uno? La quarta nota anticipa la risposta: entrambi, a seconda di come si leggono i bit. Il resto della lezione è l'insieme di regole che sta dietro a quella frase.
+DA COMPRENDERE OGGI: il complemento a due. DA UTILIZZARE OGGI: le chiamate del runtime PRG32 (si usa, non si studia, in questo corso).
 Per il docente: Adattato dal laboratorio 06-asm-state-and-input del libro di PRG32 (step2_move.S) con SPEED 1 e una stampa sulla console. Dove guardare: sulla scheda e in QEMU la console è disegnata sullo schermo, come 0x00000002 ... 0xffffffff; PRG32-QT non disegna la console, la raccoglie nel suo log, come 00000002 ... FFFFFFFF. Eseguirlo dal vivo prima di ogni teoria, e scrivere alla lavagna le ipotesi degli studenti.</a:t>
             </a:r>
             <a:endParaRPr lang="en-US" dirty="0"/>
@@ -1828,6 +1840,7 @@
             <a:r>
               <a:rPr lang="en-US" dirty="0"/>
               <a:t>Tre proprietà delle stringhe binarie, ciascuna con un uso. Aggiungere zeri a sinistra non cambia il valore. Scorrere a sinistra di k posizioni moltiplica per 2 alla k: 00101, cinque, diventa 01010, dieci. Scorrere a destra di k divide per 2 alla k e scarta il resto. Per un circuito uno scorrimento costa molto meno di una moltiplicazione, e il codice a destra mostra il trucco usato dai compilatori: dieci volte x è otto volte x più due volte x, due scorrimenti e una somma.
+DA COMPRENDERE OGGI: shift come moltiplicazione.
 Per il docente: Nella Lezione 04 avete usato slli t1, t1, 2 per moltiplicare per quattro l'indice di un vettore. Gli scorrimenti sono anche la base dell'aritmetica in virgola fissa (Lezione 06).</a:t>
             </a:r>
             <a:endParaRPr lang="en-US" dirty="0"/>
@@ -1917,6 +1930,7 @@
             <a:r>
               <a:rPr lang="en-US" dirty="0"/>
               <a:t>Per cambiare segno a un numero ci sono due metodi. Il primo: si complementa ogni bit, poi si somma 1; sei, 0110, diventa 1001 e poi 1010, meno sei. Il secondo, più rapido a mano: partendo da destra si copiano i bit fino al primo 1 compreso, e si complementano tutti gli altri. Il codice mostra che a RISC-V non serve nemmeno un'istruzione apposita: neg è una pseudo-istruzione per sub dal registro zero. Un'eccezione: il numero più negativo non ha un compagno positivo, e cambiandogli segno si riottiene il numero stesso.
+DA COMPRENDERE OGGI: il complemento a due.
 Per il docente: Perché il metodo 1 funziona: il complemento di x è (2^n - 1) - x, quindi sommando 1 si ottiene 2^n - x. La slide originale descriveva il metodo 2 «da sinistra»; la regola scorre da destra.</a:t>
             </a:r>
             <a:endParaRPr lang="en-US" dirty="0"/>
@@ -2006,6 +2020,7 @@
             <a:r>
               <a:rPr lang="en-US" dirty="0"/>
               <a:t>Ora il riscaldamento si può spiegare per intero. Il segnalino era a 0, e addi con meno 1 ha fatto un passo indietro su una ruota di 2 alla 32 posizioni: il registro contiene ora trentadue uni. Letti senza segno valgono 4.294.967.295; in complemento a due valgono meno 1. La funzione che stampa mostra la configurazione e non prende posizione. Il segnalino scompare perché in entrambe le letture viene disegnato fuori schermo. Non è mai stato un bug del processore: al programma mancava una decisione.
+DA COMPRENDERE OGGI: istruzioni con o senza segno.
 Per il docente: Non è un bug del processore: è una decisione che manca nel programma. La correzione è nelle prossime slide.</a:t>
             </a:r>
             <a:endParaRPr lang="en-US" dirty="0"/>
@@ -2095,6 +2110,7 @@
             <a:r>
               <a:rPr lang="en-US" dirty="0"/>
               <a:t>I registri RISC-V non hanno tipo: trentadue bit sono con segno o senza segno solo per l'istruzione che li legge. La tabella mostra dove le due letture richiedono istruzioni diverse. Somma, sottrazione e parte bassa del prodotto sono le stesse. Confronti, salti condizionati, scorrimenti a destra, caricamenti di un byte e divisioni vanno a coppie: slt e sltu, blt e bltu, sra e srl, lb e lbu, div e divu. La lettera u nel nome significa sempre unsigned, senza segno. Scegliere il membro sbagliato della coppia è un errore classico.
+DA COMPRENDERE OGGI: istruzioni con o senza segno.
 Per il docente: I registri RISC-V non hanno tipo. Gli stessi 32 bit sono con segno o senza segno solo agli occhi dell'istruzione che li legge.</a:t>
             </a:r>
             <a:endParaRPr lang="en-US" dirty="0"/>
@@ -2184,6 +2200,7 @@
             <a:r>
               <a:rPr lang="en-US" dirty="0"/>
               <a:t>Il programma corretto tiene il segnalino sullo schermo. Dopo i due possibili passi, bgez chiede se la posizione è maggiore o uguale a zero, leggendola come numero con segno: se no, la posizione viene posta a 0. Poi ble la confronta con il massimo, 304, sempre con segno, e la limita. Si chiama clamping. Notate il metodo: un gioco non rileva l'overflow a cose fatte; tiene i valori in un intervallo in cui l'overflow non può avvenire. Una sola sw alla fine memorizza il valore corretto.
+DA COMPRENDERE OGGI: istruzioni con o senza segno.
 Per il docente: Sorgente: laboratorio 06-asm-state-and-input del libro di PRG32, step3_clamp.S. Chiedere che cosa accade con bgeu o bltu al loro posto: un bug istruttivo da provare.</a:t>
             </a:r>
             <a:endParaRPr lang="en-US" dirty="0"/>
@@ -2273,6 +2290,7 @@
             <a:r>
               <a:rPr lang="en-US" dirty="0"/>
               <a:t>Molti processori hanno un flag di riporto e uno di overflow; RISC-V non ha né l'uno né l'altro, e un overflow si rileva con un confronto. Senza segno: dopo add, se la somma è minore di uno degli operandi, la somma ha fatto il giro; sltu lo verifica con una sola istruzione. Con segno: sommare un numero negativo deve rendere la somma minore, sommarne uno non negativo no; se i due fatti non concordano, c'è stato overflow. Confrontate con la ruota: il primo test rileva l'attraversamento in alto, il secondo quello in basso.
+DA COMPRENDERE OGGI: istruzioni con o senza segno.
 Per il docente: Entrambi gli idiomi sono quelli suggeriti nella specifica RISC-V. Confrontare con la ruota: sltu rileva l'attraversamento in alto, il test con segno quello in basso.</a:t>
             </a:r>
             <a:endParaRPr lang="en-US" dirty="0"/>
@@ -3354,6 +3372,420 @@
       </p:pic>
       <p:sp>
         <p:nvSpPr>
+          <p:cNvPr id="14" name="Shape 11"/>
+          <p:cNvSpPr/>
+          <p:nvPr/>
+        </p:nvSpPr>
+        <p:spPr>
+          <a:xfrm>
+            <a:off x="8910777" y="91440"/>
+            <a:ext cx="2732278" cy="274320"/>
+          </a:xfrm>
+          <a:prstGeom prst="rect">
+            <a:avLst/>
+          </a:prstGeom>
+          <a:solidFill>
+            <a:srgbClr val="F3E8FF"/>
+          </a:solidFill>
+          <a:ln w="12700">
+            <a:solidFill>
+              <a:srgbClr val="7E22CE"/>
+            </a:solidFill>
+            <a:prstDash val="dash"/>
+          </a:ln>
+        </p:spPr>
+      </p:sp>
+      <p:sp>
+        <p:nvSpPr>
+          <p:cNvPr id="15" name="Shape 12"/>
+          <p:cNvSpPr/>
+          <p:nvPr/>
+        </p:nvSpPr>
+        <p:spPr>
+          <a:xfrm>
+            <a:off x="8938209" y="128016"/>
+            <a:ext cx="45720" cy="45720"/>
+          </a:xfrm>
+          <a:prstGeom prst="rect">
+            <a:avLst/>
+          </a:prstGeom>
+          <a:solidFill>
+            <a:srgbClr val="7E22CE"/>
+          </a:solidFill>
+          <a:ln w="12700">
+            <a:solidFill>
+              <a:srgbClr val="7E22CE"/>
+            </a:solidFill>
+            <a:prstDash val="solid"/>
+          </a:ln>
+        </p:spPr>
+      </p:sp>
+      <p:sp>
+        <p:nvSpPr>
+          <p:cNvPr id="16" name="Shape 13"/>
+          <p:cNvSpPr/>
+          <p:nvPr/>
+        </p:nvSpPr>
+        <p:spPr>
+          <a:xfrm>
+            <a:off x="8938209" y="205740"/>
+            <a:ext cx="45720" cy="45720"/>
+          </a:xfrm>
+          <a:prstGeom prst="rect">
+            <a:avLst/>
+          </a:prstGeom>
+          <a:solidFill>
+            <a:srgbClr val="7E22CE"/>
+          </a:solidFill>
+          <a:ln w="12700">
+            <a:solidFill>
+              <a:srgbClr val="7E22CE"/>
+            </a:solidFill>
+            <a:prstDash val="solid"/>
+          </a:ln>
+        </p:spPr>
+      </p:sp>
+      <p:sp>
+        <p:nvSpPr>
+          <p:cNvPr id="17" name="Shape 14"/>
+          <p:cNvSpPr/>
+          <p:nvPr/>
+        </p:nvSpPr>
+        <p:spPr>
+          <a:xfrm>
+            <a:off x="8938209" y="283464"/>
+            <a:ext cx="45720" cy="45720"/>
+          </a:xfrm>
+          <a:prstGeom prst="rect">
+            <a:avLst/>
+          </a:prstGeom>
+          <a:solidFill>
+            <a:srgbClr val="7E22CE"/>
+          </a:solidFill>
+          <a:ln w="12700">
+            <a:solidFill>
+              <a:srgbClr val="7E22CE"/>
+            </a:solidFill>
+            <a:prstDash val="solid"/>
+          </a:ln>
+        </p:spPr>
+      </p:sp>
+      <p:pic>
+        <p:nvPicPr>
+          <p:cNvPr id="18" name="Image 1" descr="preencoded.png">    </p:cNvPr>
+          <p:cNvPicPr>
+            <a:picLocks noChangeAspect="1"/>
+          </p:cNvPicPr>
+          <p:nvPr/>
+        </p:nvPicPr>
+        <p:blipFill>
+          <a:blip r:embed="rId2"/>
+          <a:stretch>
+            <a:fillRect/>
+          </a:stretch>
+        </p:blipFill>
+        <p:spPr>
+          <a:xfrm>
+            <a:off x="9038793" y="128016"/>
+            <a:ext cx="201168" cy="201168"/>
+          </a:xfrm>
+          <a:prstGeom prst="rect">
+            <a:avLst/>
+          </a:prstGeom>
+        </p:spPr>
+      </p:pic>
+      <p:sp>
+        <p:nvSpPr>
+          <p:cNvPr id="19" name="Text 15"/>
+          <p:cNvSpPr txBox="1"/>
+          <p:nvPr/>
+        </p:nvSpPr>
+        <p:spPr>
+          <a:xfrm>
+            <a:off x="9294825" y="91440"/>
+            <a:ext cx="2311654" cy="274320"/>
+          </a:xfrm>
+          <a:prstGeom prst="rect">
+            <a:avLst/>
+          </a:prstGeom>
+          <a:noFill/>
+          <a:ln/>
+        </p:spPr>
+        <p:txBody>
+          <a:bodyPr wrap="square" lIns="0" tIns="0" rIns="0" bIns="0" rtlCol="0" anchor="ctr"/>
+          <a:lstStyle/>
+          <a:p>
+            <a:pPr indent="0" marL="0">
+              <a:buNone/>
+            </a:pPr>
+            <a:r>
+              <a:rPr lang="en-US" sz="1100" b="1" dirty="0">
+                <a:solidFill>
+                  <a:srgbClr val="6B21A8"/>
+                </a:solidFill>
+                <a:latin typeface="Calibri" pitchFamily="34" charset="0"/>
+                <a:ea typeface="Calibri" pitchFamily="34" charset="-122"/>
+                <a:cs typeface="Calibri" pitchFamily="34" charset="-120"/>
+              </a:rPr>
+              <a:t>DA COMPRENDERE PIÙ AVANTI</a:t>
+            </a:r>
+            <a:endParaRPr lang="en-US" sz="1100" dirty="0"/>
+          </a:p>
+        </p:txBody>
+      </p:sp>
+      <p:sp>
+        <p:nvSpPr>
+          <p:cNvPr id="20" name="Shape 16"/>
+          <p:cNvSpPr/>
+          <p:nvPr/>
+        </p:nvSpPr>
+        <p:spPr>
+          <a:xfrm>
+            <a:off x="6675069" y="91440"/>
+            <a:ext cx="2125980" cy="274320"/>
+          </a:xfrm>
+          <a:prstGeom prst="rect">
+            <a:avLst/>
+          </a:prstGeom>
+          <a:solidFill>
+            <a:srgbClr val="FEF3C7"/>
+          </a:solidFill>
+          <a:ln w="12700">
+            <a:solidFill>
+              <a:srgbClr val="B45309"/>
+            </a:solidFill>
+            <a:prstDash val="solid"/>
+          </a:ln>
+        </p:spPr>
+      </p:sp>
+      <p:sp>
+        <p:nvSpPr>
+          <p:cNvPr id="21" name="Shape 17"/>
+          <p:cNvSpPr/>
+          <p:nvPr/>
+        </p:nvSpPr>
+        <p:spPr>
+          <a:xfrm>
+            <a:off x="6675069" y="91440"/>
+            <a:ext cx="27432" cy="274320"/>
+          </a:xfrm>
+          <a:prstGeom prst="rect">
+            <a:avLst/>
+          </a:prstGeom>
+          <a:solidFill>
+            <a:srgbClr val="B45309"/>
+          </a:solidFill>
+          <a:ln w="12700">
+            <a:solidFill>
+              <a:srgbClr val="B45309"/>
+            </a:solidFill>
+            <a:prstDash val="solid"/>
+          </a:ln>
+        </p:spPr>
+      </p:sp>
+      <p:sp>
+        <p:nvSpPr>
+          <p:cNvPr id="22" name="Shape 18"/>
+          <p:cNvSpPr/>
+          <p:nvPr/>
+        </p:nvSpPr>
+        <p:spPr>
+          <a:xfrm>
+            <a:off x="6729933" y="91440"/>
+            <a:ext cx="27432" cy="274320"/>
+          </a:xfrm>
+          <a:prstGeom prst="rect">
+            <a:avLst/>
+          </a:prstGeom>
+          <a:solidFill>
+            <a:srgbClr val="B45309"/>
+          </a:solidFill>
+          <a:ln w="12700">
+            <a:solidFill>
+              <a:srgbClr val="B45309"/>
+            </a:solidFill>
+            <a:prstDash val="solid"/>
+          </a:ln>
+        </p:spPr>
+      </p:sp>
+      <p:pic>
+        <p:nvPicPr>
+          <p:cNvPr id="23" name="Image 2" descr="preencoded.png">    </p:cNvPr>
+          <p:cNvPicPr>
+            <a:picLocks noChangeAspect="1"/>
+          </p:cNvPicPr>
+          <p:nvPr/>
+        </p:nvPicPr>
+        <p:blipFill>
+          <a:blip r:embed="rId3"/>
+          <a:stretch>
+            <a:fillRect/>
+          </a:stretch>
+        </p:blipFill>
+        <p:spPr>
+          <a:xfrm>
+            <a:off x="6803085" y="128016"/>
+            <a:ext cx="201168" cy="201168"/>
+          </a:xfrm>
+          <a:prstGeom prst="rect">
+            <a:avLst/>
+          </a:prstGeom>
+        </p:spPr>
+      </p:pic>
+      <p:sp>
+        <p:nvSpPr>
+          <p:cNvPr id="24" name="Text 19"/>
+          <p:cNvSpPr txBox="1"/>
+          <p:nvPr/>
+        </p:nvSpPr>
+        <p:spPr>
+          <a:xfrm>
+            <a:off x="7059117" y="91440"/>
+            <a:ext cx="1705356" cy="274320"/>
+          </a:xfrm>
+          <a:prstGeom prst="rect">
+            <a:avLst/>
+          </a:prstGeom>
+          <a:noFill/>
+          <a:ln/>
+        </p:spPr>
+        <p:txBody>
+          <a:bodyPr wrap="square" lIns="0" tIns="0" rIns="0" bIns="0" rtlCol="0" anchor="ctr"/>
+          <a:lstStyle/>
+          <a:p>
+            <a:pPr indent="0" marL="0">
+              <a:buNone/>
+            </a:pPr>
+            <a:r>
+              <a:rPr lang="en-US" sz="1100" b="1" dirty="0">
+                <a:solidFill>
+                  <a:srgbClr val="92400E"/>
+                </a:solidFill>
+                <a:latin typeface="Calibri" pitchFamily="34" charset="0"/>
+                <a:ea typeface="Calibri" pitchFamily="34" charset="-122"/>
+                <a:cs typeface="Calibri" pitchFamily="34" charset="-120"/>
+              </a:rPr>
+              <a:t>DA UTILIZZARE OGGI</a:t>
+            </a:r>
+            <a:endParaRPr lang="en-US" sz="1100" dirty="0"/>
+          </a:p>
+        </p:txBody>
+      </p:sp>
+      <p:sp>
+        <p:nvSpPr>
+          <p:cNvPr id="25" name="Shape 20"/>
+          <p:cNvSpPr/>
+          <p:nvPr/>
+        </p:nvSpPr>
+        <p:spPr>
+          <a:xfrm>
+            <a:off x="4352747" y="91440"/>
+            <a:ext cx="2212594" cy="274320"/>
+          </a:xfrm>
+          <a:prstGeom prst="rect">
+            <a:avLst/>
+          </a:prstGeom>
+          <a:solidFill>
+            <a:srgbClr val="E0F2FE"/>
+          </a:solidFill>
+          <a:ln w="12700">
+            <a:solidFill>
+              <a:srgbClr val="0369A1"/>
+            </a:solidFill>
+            <a:prstDash val="solid"/>
+          </a:ln>
+        </p:spPr>
+      </p:sp>
+      <p:sp>
+        <p:nvSpPr>
+          <p:cNvPr id="26" name="Shape 21"/>
+          <p:cNvSpPr/>
+          <p:nvPr/>
+        </p:nvSpPr>
+        <p:spPr>
+          <a:xfrm>
+            <a:off x="4352747" y="91440"/>
+            <a:ext cx="73152" cy="274320"/>
+          </a:xfrm>
+          <a:prstGeom prst="rect">
+            <a:avLst/>
+          </a:prstGeom>
+          <a:solidFill>
+            <a:srgbClr val="0369A1"/>
+          </a:solidFill>
+          <a:ln w="12700">
+            <a:solidFill>
+              <a:srgbClr val="0369A1"/>
+            </a:solidFill>
+            <a:prstDash val="solid"/>
+          </a:ln>
+        </p:spPr>
+      </p:sp>
+      <p:pic>
+        <p:nvPicPr>
+          <p:cNvPr id="27" name="Image 3" descr="preencoded.png">    </p:cNvPr>
+          <p:cNvPicPr>
+            <a:picLocks noChangeAspect="1"/>
+          </p:cNvPicPr>
+          <p:nvPr/>
+        </p:nvPicPr>
+        <p:blipFill>
+          <a:blip r:embed="rId4"/>
+          <a:stretch>
+            <a:fillRect/>
+          </a:stretch>
+        </p:blipFill>
+        <p:spPr>
+          <a:xfrm>
+            <a:off x="4480763" y="128016"/>
+            <a:ext cx="201168" cy="201168"/>
+          </a:xfrm>
+          <a:prstGeom prst="rect">
+            <a:avLst/>
+          </a:prstGeom>
+        </p:spPr>
+      </p:pic>
+      <p:sp>
+        <p:nvSpPr>
+          <p:cNvPr id="28" name="Text 22"/>
+          <p:cNvSpPr txBox="1"/>
+          <p:nvPr/>
+        </p:nvSpPr>
+        <p:spPr>
+          <a:xfrm>
+            <a:off x="4736795" y="91440"/>
+            <a:ext cx="1791970" cy="274320"/>
+          </a:xfrm>
+          <a:prstGeom prst="rect">
+            <a:avLst/>
+          </a:prstGeom>
+          <a:noFill/>
+          <a:ln/>
+        </p:spPr>
+        <p:txBody>
+          <a:bodyPr wrap="square" lIns="0" tIns="0" rIns="0" bIns="0" rtlCol="0" anchor="ctr"/>
+          <a:lstStyle/>
+          <a:p>
+            <a:pPr indent="0" marL="0">
+              <a:buNone/>
+            </a:pPr>
+            <a:r>
+              <a:rPr lang="en-US" sz="1100" b="1" dirty="0">
+                <a:solidFill>
+                  <a:srgbClr val="075985"/>
+                </a:solidFill>
+                <a:latin typeface="Calibri" pitchFamily="34" charset="0"/>
+                <a:ea typeface="Calibri" pitchFamily="34" charset="-122"/>
+                <a:cs typeface="Calibri" pitchFamily="34" charset="-120"/>
+              </a:rPr>
+              <a:t>DA COMPRENDERE OGGI</a:t>
+            </a:r>
+            <a:endParaRPr lang="en-US" sz="1100" dirty="0"/>
+          </a:p>
+        </p:txBody>
+      </p:sp>
+      <p:sp>
+        <p:nvSpPr>
           <p:cNvPr id="25" name="Slide Number Placeholder 0"/>
           <p:cNvSpPr>
             <a:spLocks noGrp="1"/>
@@ -3891,6 +4323,158 @@
       </p:sp>
       <p:sp>
         <p:nvSpPr>
+          <p:cNvPr id="5" name="Shape 3"/>
+          <p:cNvSpPr/>
+          <p:nvPr/>
+        </p:nvSpPr>
+        <p:spPr>
+          <a:xfrm>
+            <a:off x="7941259" y="91440"/>
+            <a:ext cx="3701796" cy="274320"/>
+          </a:xfrm>
+          <a:prstGeom prst="rect">
+            <a:avLst/>
+          </a:prstGeom>
+          <a:solidFill>
+            <a:srgbClr val="FEF3C7"/>
+          </a:solidFill>
+          <a:ln w="12700">
+            <a:solidFill>
+              <a:srgbClr val="B45309"/>
+            </a:solidFill>
+            <a:prstDash val="solid"/>
+          </a:ln>
+        </p:spPr>
+      </p:sp>
+      <p:sp>
+        <p:nvSpPr>
+          <p:cNvPr id="6" name="Shape 4"/>
+          <p:cNvSpPr/>
+          <p:nvPr/>
+        </p:nvSpPr>
+        <p:spPr>
+          <a:xfrm>
+            <a:off x="7941259" y="91440"/>
+            <a:ext cx="27432" cy="274320"/>
+          </a:xfrm>
+          <a:prstGeom prst="rect">
+            <a:avLst/>
+          </a:prstGeom>
+          <a:solidFill>
+            <a:srgbClr val="B45309"/>
+          </a:solidFill>
+          <a:ln w="12700">
+            <a:solidFill>
+              <a:srgbClr val="B45309"/>
+            </a:solidFill>
+            <a:prstDash val="solid"/>
+          </a:ln>
+        </p:spPr>
+      </p:sp>
+      <p:sp>
+        <p:nvSpPr>
+          <p:cNvPr id="7" name="Shape 5"/>
+          <p:cNvSpPr/>
+          <p:nvPr/>
+        </p:nvSpPr>
+        <p:spPr>
+          <a:xfrm>
+            <a:off x="7996123" y="91440"/>
+            <a:ext cx="27432" cy="274320"/>
+          </a:xfrm>
+          <a:prstGeom prst="rect">
+            <a:avLst/>
+          </a:prstGeom>
+          <a:solidFill>
+            <a:srgbClr val="B45309"/>
+          </a:solidFill>
+          <a:ln w="12700">
+            <a:solidFill>
+              <a:srgbClr val="B45309"/>
+            </a:solidFill>
+            <a:prstDash val="solid"/>
+          </a:ln>
+        </p:spPr>
+      </p:sp>
+      <p:pic>
+        <p:nvPicPr>
+          <p:cNvPr id="8" name="Image 0" descr="preencoded.png">    </p:cNvPr>
+          <p:cNvPicPr>
+            <a:picLocks noChangeAspect="1"/>
+          </p:cNvPicPr>
+          <p:nvPr/>
+        </p:nvPicPr>
+        <p:blipFill>
+          <a:blip r:embed="rId1"/>
+          <a:stretch>
+            <a:fillRect/>
+          </a:stretch>
+        </p:blipFill>
+        <p:spPr>
+          <a:xfrm>
+            <a:off x="8069275" y="128016"/>
+            <a:ext cx="201168" cy="201168"/>
+          </a:xfrm>
+          <a:prstGeom prst="rect">
+            <a:avLst/>
+          </a:prstGeom>
+        </p:spPr>
+      </p:pic>
+      <p:sp>
+        <p:nvSpPr>
+          <p:cNvPr id="9" name="Text 6"/>
+          <p:cNvSpPr txBox="1"/>
+          <p:nvPr/>
+        </p:nvSpPr>
+        <p:spPr>
+          <a:xfrm>
+            <a:off x="8325307" y="91440"/>
+            <a:ext cx="3281172" cy="274320"/>
+          </a:xfrm>
+          <a:prstGeom prst="rect">
+            <a:avLst/>
+          </a:prstGeom>
+          <a:noFill/>
+          <a:ln/>
+        </p:spPr>
+        <p:txBody>
+          <a:bodyPr wrap="square" lIns="0" tIns="0" rIns="0" bIns="0" rtlCol="0" anchor="ctr"/>
+          <a:lstStyle/>
+          <a:p>
+            <a:pPr indent="0" marL="0">
+              <a:buNone/>
+            </a:pPr>
+            <a:r>
+              <a:rPr lang="en-US" sz="1100" b="1" dirty="0">
+                <a:solidFill>
+                  <a:srgbClr val="92400E"/>
+                </a:solidFill>
+                <a:latin typeface="Calibri" pitchFamily="34" charset="0"/>
+                <a:ea typeface="Calibri" pitchFamily="34" charset="-122"/>
+                <a:cs typeface="Calibri" pitchFamily="34" charset="-120"/>
+              </a:rPr>
+              <a:t>DA UTILIZZARE OGGI</a:t>
+            </a:r>
+            <a:pPr indent="0" marL="0">
+              <a:buNone/>
+            </a:pPr>
+            <a:r>
+              <a:rPr lang="en-US" sz="1100" dirty="0">
+                <a:solidFill>
+                  <a:srgbClr val="92400E"/>
+                </a:solidFill>
+                <a:latin typeface="Calibri" pitchFamily="34" charset="0"/>
+                <a:ea typeface="Calibri" pitchFamily="34" charset="-122"/>
+                <a:cs typeface="Calibri" pitchFamily="34" charset="-120"/>
+              </a:rPr>
+              <a:t> · il programma completo</a:t>
+            </a:r>
+            <a:endParaRPr lang="en-US" sz="1100" dirty="0"/>
+          </a:p>
+        </p:txBody>
+      </p:sp>
+      <p:sp>
+        <p:nvSpPr>
           <p:cNvPr id="25" name="Slide Number Placeholder 0"/>
           <p:cNvSpPr>
             <a:spLocks noGrp="1"/>
@@ -4365,6 +4949,158 @@
       </p:sp>
       <p:sp>
         <p:nvSpPr>
+          <p:cNvPr id="5" name="Shape 3"/>
+          <p:cNvSpPr/>
+          <p:nvPr/>
+        </p:nvSpPr>
+        <p:spPr>
+          <a:xfrm>
+            <a:off x="7941259" y="91440"/>
+            <a:ext cx="3701796" cy="274320"/>
+          </a:xfrm>
+          <a:prstGeom prst="rect">
+            <a:avLst/>
+          </a:prstGeom>
+          <a:solidFill>
+            <a:srgbClr val="FEF3C7"/>
+          </a:solidFill>
+          <a:ln w="12700">
+            <a:solidFill>
+              <a:srgbClr val="B45309"/>
+            </a:solidFill>
+            <a:prstDash val="solid"/>
+          </a:ln>
+        </p:spPr>
+      </p:sp>
+      <p:sp>
+        <p:nvSpPr>
+          <p:cNvPr id="6" name="Shape 4"/>
+          <p:cNvSpPr/>
+          <p:nvPr/>
+        </p:nvSpPr>
+        <p:spPr>
+          <a:xfrm>
+            <a:off x="7941259" y="91440"/>
+            <a:ext cx="27432" cy="274320"/>
+          </a:xfrm>
+          <a:prstGeom prst="rect">
+            <a:avLst/>
+          </a:prstGeom>
+          <a:solidFill>
+            <a:srgbClr val="B45309"/>
+          </a:solidFill>
+          <a:ln w="12700">
+            <a:solidFill>
+              <a:srgbClr val="B45309"/>
+            </a:solidFill>
+            <a:prstDash val="solid"/>
+          </a:ln>
+        </p:spPr>
+      </p:sp>
+      <p:sp>
+        <p:nvSpPr>
+          <p:cNvPr id="7" name="Shape 5"/>
+          <p:cNvSpPr/>
+          <p:nvPr/>
+        </p:nvSpPr>
+        <p:spPr>
+          <a:xfrm>
+            <a:off x="7996123" y="91440"/>
+            <a:ext cx="27432" cy="274320"/>
+          </a:xfrm>
+          <a:prstGeom prst="rect">
+            <a:avLst/>
+          </a:prstGeom>
+          <a:solidFill>
+            <a:srgbClr val="B45309"/>
+          </a:solidFill>
+          <a:ln w="12700">
+            <a:solidFill>
+              <a:srgbClr val="B45309"/>
+            </a:solidFill>
+            <a:prstDash val="solid"/>
+          </a:ln>
+        </p:spPr>
+      </p:sp>
+      <p:pic>
+        <p:nvPicPr>
+          <p:cNvPr id="8" name="Image 0" descr="preencoded.png">    </p:cNvPr>
+          <p:cNvPicPr>
+            <a:picLocks noChangeAspect="1"/>
+          </p:cNvPicPr>
+          <p:nvPr/>
+        </p:nvPicPr>
+        <p:blipFill>
+          <a:blip r:embed="rId1"/>
+          <a:stretch>
+            <a:fillRect/>
+          </a:stretch>
+        </p:blipFill>
+        <p:spPr>
+          <a:xfrm>
+            <a:off x="8069275" y="128016"/>
+            <a:ext cx="201168" cy="201168"/>
+          </a:xfrm>
+          <a:prstGeom prst="rect">
+            <a:avLst/>
+          </a:prstGeom>
+        </p:spPr>
+      </p:pic>
+      <p:sp>
+        <p:nvSpPr>
+          <p:cNvPr id="9" name="Text 6"/>
+          <p:cNvSpPr txBox="1"/>
+          <p:nvPr/>
+        </p:nvSpPr>
+        <p:spPr>
+          <a:xfrm>
+            <a:off x="8325307" y="91440"/>
+            <a:ext cx="3281172" cy="274320"/>
+          </a:xfrm>
+          <a:prstGeom prst="rect">
+            <a:avLst/>
+          </a:prstGeom>
+          <a:noFill/>
+          <a:ln/>
+        </p:spPr>
+        <p:txBody>
+          <a:bodyPr wrap="square" lIns="0" tIns="0" rIns="0" bIns="0" rtlCol="0" anchor="ctr"/>
+          <a:lstStyle/>
+          <a:p>
+            <a:pPr indent="0" marL="0">
+              <a:buNone/>
+            </a:pPr>
+            <a:r>
+              <a:rPr lang="en-US" sz="1100" b="1" dirty="0">
+                <a:solidFill>
+                  <a:srgbClr val="92400E"/>
+                </a:solidFill>
+                <a:latin typeface="Calibri" pitchFamily="34" charset="0"/>
+                <a:ea typeface="Calibri" pitchFamily="34" charset="-122"/>
+                <a:cs typeface="Calibri" pitchFamily="34" charset="-120"/>
+              </a:rPr>
+              <a:t>DA UTILIZZARE OGGI</a:t>
+            </a:r>
+            <a:pPr indent="0" marL="0">
+              <a:buNone/>
+            </a:pPr>
+            <a:r>
+              <a:rPr lang="en-US" sz="1100" dirty="0">
+                <a:solidFill>
+                  <a:srgbClr val="92400E"/>
+                </a:solidFill>
+                <a:latin typeface="Calibri" pitchFamily="34" charset="0"/>
+                <a:ea typeface="Calibri" pitchFamily="34" charset="-122"/>
+                <a:cs typeface="Calibri" pitchFamily="34" charset="-120"/>
+              </a:rPr>
+              <a:t> · il programma completo</a:t>
+            </a:r>
+            <a:endParaRPr lang="en-US" sz="1100" dirty="0"/>
+          </a:p>
+        </p:txBody>
+      </p:sp>
+      <p:sp>
+        <p:nvSpPr>
           <p:cNvPr id="25" name="Slide Number Placeholder 0"/>
           <p:cNvSpPr>
             <a:spLocks noGrp="1"/>
@@ -4856,6 +5592,158 @@
       </p:sp>
       <p:sp>
         <p:nvSpPr>
+          <p:cNvPr id="5" name="Shape 3"/>
+          <p:cNvSpPr/>
+          <p:nvPr/>
+        </p:nvSpPr>
+        <p:spPr>
+          <a:xfrm>
+            <a:off x="7941259" y="91440"/>
+            <a:ext cx="3701796" cy="274320"/>
+          </a:xfrm>
+          <a:prstGeom prst="rect">
+            <a:avLst/>
+          </a:prstGeom>
+          <a:solidFill>
+            <a:srgbClr val="FEF3C7"/>
+          </a:solidFill>
+          <a:ln w="12700">
+            <a:solidFill>
+              <a:srgbClr val="B45309"/>
+            </a:solidFill>
+            <a:prstDash val="solid"/>
+          </a:ln>
+        </p:spPr>
+      </p:sp>
+      <p:sp>
+        <p:nvSpPr>
+          <p:cNvPr id="6" name="Shape 4"/>
+          <p:cNvSpPr/>
+          <p:nvPr/>
+        </p:nvSpPr>
+        <p:spPr>
+          <a:xfrm>
+            <a:off x="7941259" y="91440"/>
+            <a:ext cx="27432" cy="274320"/>
+          </a:xfrm>
+          <a:prstGeom prst="rect">
+            <a:avLst/>
+          </a:prstGeom>
+          <a:solidFill>
+            <a:srgbClr val="B45309"/>
+          </a:solidFill>
+          <a:ln w="12700">
+            <a:solidFill>
+              <a:srgbClr val="B45309"/>
+            </a:solidFill>
+            <a:prstDash val="solid"/>
+          </a:ln>
+        </p:spPr>
+      </p:sp>
+      <p:sp>
+        <p:nvSpPr>
+          <p:cNvPr id="7" name="Shape 5"/>
+          <p:cNvSpPr/>
+          <p:nvPr/>
+        </p:nvSpPr>
+        <p:spPr>
+          <a:xfrm>
+            <a:off x="7996123" y="91440"/>
+            <a:ext cx="27432" cy="274320"/>
+          </a:xfrm>
+          <a:prstGeom prst="rect">
+            <a:avLst/>
+          </a:prstGeom>
+          <a:solidFill>
+            <a:srgbClr val="B45309"/>
+          </a:solidFill>
+          <a:ln w="12700">
+            <a:solidFill>
+              <a:srgbClr val="B45309"/>
+            </a:solidFill>
+            <a:prstDash val="solid"/>
+          </a:ln>
+        </p:spPr>
+      </p:sp>
+      <p:pic>
+        <p:nvPicPr>
+          <p:cNvPr id="8" name="Image 0" descr="preencoded.png">    </p:cNvPr>
+          <p:cNvPicPr>
+            <a:picLocks noChangeAspect="1"/>
+          </p:cNvPicPr>
+          <p:nvPr/>
+        </p:nvPicPr>
+        <p:blipFill>
+          <a:blip r:embed="rId1"/>
+          <a:stretch>
+            <a:fillRect/>
+          </a:stretch>
+        </p:blipFill>
+        <p:spPr>
+          <a:xfrm>
+            <a:off x="8069275" y="128016"/>
+            <a:ext cx="201168" cy="201168"/>
+          </a:xfrm>
+          <a:prstGeom prst="rect">
+            <a:avLst/>
+          </a:prstGeom>
+        </p:spPr>
+      </p:pic>
+      <p:sp>
+        <p:nvSpPr>
+          <p:cNvPr id="9" name="Text 6"/>
+          <p:cNvSpPr txBox="1"/>
+          <p:nvPr/>
+        </p:nvSpPr>
+        <p:spPr>
+          <a:xfrm>
+            <a:off x="8325307" y="91440"/>
+            <a:ext cx="3281172" cy="274320"/>
+          </a:xfrm>
+          <a:prstGeom prst="rect">
+            <a:avLst/>
+          </a:prstGeom>
+          <a:noFill/>
+          <a:ln/>
+        </p:spPr>
+        <p:txBody>
+          <a:bodyPr wrap="square" lIns="0" tIns="0" rIns="0" bIns="0" rtlCol="0" anchor="ctr"/>
+          <a:lstStyle/>
+          <a:p>
+            <a:pPr indent="0" marL="0">
+              <a:buNone/>
+            </a:pPr>
+            <a:r>
+              <a:rPr lang="en-US" sz="1100" b="1" dirty="0">
+                <a:solidFill>
+                  <a:srgbClr val="92400E"/>
+                </a:solidFill>
+                <a:latin typeface="Calibri" pitchFamily="34" charset="0"/>
+                <a:ea typeface="Calibri" pitchFamily="34" charset="-122"/>
+                <a:cs typeface="Calibri" pitchFamily="34" charset="-120"/>
+              </a:rPr>
+              <a:t>DA UTILIZZARE OGGI</a:t>
+            </a:r>
+            <a:pPr indent="0" marL="0">
+              <a:buNone/>
+            </a:pPr>
+            <a:r>
+              <a:rPr lang="en-US" sz="1100" dirty="0">
+                <a:solidFill>
+                  <a:srgbClr val="92400E"/>
+                </a:solidFill>
+                <a:latin typeface="Calibri" pitchFamily="34" charset="0"/>
+                <a:ea typeface="Calibri" pitchFamily="34" charset="-122"/>
+                <a:cs typeface="Calibri" pitchFamily="34" charset="-120"/>
+              </a:rPr>
+              <a:t> · il programma completo</a:t>
+            </a:r>
+            <a:endParaRPr lang="en-US" sz="1100" dirty="0"/>
+          </a:p>
+        </p:txBody>
+      </p:sp>
+      <p:sp>
+        <p:nvSpPr>
           <p:cNvPr id="25" name="Slide Number Placeholder 0"/>
           <p:cNvSpPr>
             <a:spLocks noGrp="1"/>
@@ -5567,6 +6455,158 @@
       </p:sp>
       <p:sp>
         <p:nvSpPr>
+          <p:cNvPr id="5" name="Shape 3"/>
+          <p:cNvSpPr/>
+          <p:nvPr/>
+        </p:nvSpPr>
+        <p:spPr>
+          <a:xfrm>
+            <a:off x="7941259" y="91440"/>
+            <a:ext cx="3701796" cy="274320"/>
+          </a:xfrm>
+          <a:prstGeom prst="rect">
+            <a:avLst/>
+          </a:prstGeom>
+          <a:solidFill>
+            <a:srgbClr val="FEF3C7"/>
+          </a:solidFill>
+          <a:ln w="12700">
+            <a:solidFill>
+              <a:srgbClr val="B45309"/>
+            </a:solidFill>
+            <a:prstDash val="solid"/>
+          </a:ln>
+        </p:spPr>
+      </p:sp>
+      <p:sp>
+        <p:nvSpPr>
+          <p:cNvPr id="6" name="Shape 4"/>
+          <p:cNvSpPr/>
+          <p:nvPr/>
+        </p:nvSpPr>
+        <p:spPr>
+          <a:xfrm>
+            <a:off x="7941259" y="91440"/>
+            <a:ext cx="27432" cy="274320"/>
+          </a:xfrm>
+          <a:prstGeom prst="rect">
+            <a:avLst/>
+          </a:prstGeom>
+          <a:solidFill>
+            <a:srgbClr val="B45309"/>
+          </a:solidFill>
+          <a:ln w="12700">
+            <a:solidFill>
+              <a:srgbClr val="B45309"/>
+            </a:solidFill>
+            <a:prstDash val="solid"/>
+          </a:ln>
+        </p:spPr>
+      </p:sp>
+      <p:sp>
+        <p:nvSpPr>
+          <p:cNvPr id="7" name="Shape 5"/>
+          <p:cNvSpPr/>
+          <p:nvPr/>
+        </p:nvSpPr>
+        <p:spPr>
+          <a:xfrm>
+            <a:off x="7996123" y="91440"/>
+            <a:ext cx="27432" cy="274320"/>
+          </a:xfrm>
+          <a:prstGeom prst="rect">
+            <a:avLst/>
+          </a:prstGeom>
+          <a:solidFill>
+            <a:srgbClr val="B45309"/>
+          </a:solidFill>
+          <a:ln w="12700">
+            <a:solidFill>
+              <a:srgbClr val="B45309"/>
+            </a:solidFill>
+            <a:prstDash val="solid"/>
+          </a:ln>
+        </p:spPr>
+      </p:sp>
+      <p:pic>
+        <p:nvPicPr>
+          <p:cNvPr id="8" name="Image 0" descr="preencoded.png">    </p:cNvPr>
+          <p:cNvPicPr>
+            <a:picLocks noChangeAspect="1"/>
+          </p:cNvPicPr>
+          <p:nvPr/>
+        </p:nvPicPr>
+        <p:blipFill>
+          <a:blip r:embed="rId1"/>
+          <a:stretch>
+            <a:fillRect/>
+          </a:stretch>
+        </p:blipFill>
+        <p:spPr>
+          <a:xfrm>
+            <a:off x="8069275" y="128016"/>
+            <a:ext cx="201168" cy="201168"/>
+          </a:xfrm>
+          <a:prstGeom prst="rect">
+            <a:avLst/>
+          </a:prstGeom>
+        </p:spPr>
+      </p:pic>
+      <p:sp>
+        <p:nvSpPr>
+          <p:cNvPr id="9" name="Text 6"/>
+          <p:cNvSpPr txBox="1"/>
+          <p:nvPr/>
+        </p:nvSpPr>
+        <p:spPr>
+          <a:xfrm>
+            <a:off x="8325307" y="91440"/>
+            <a:ext cx="3281172" cy="274320"/>
+          </a:xfrm>
+          <a:prstGeom prst="rect">
+            <a:avLst/>
+          </a:prstGeom>
+          <a:noFill/>
+          <a:ln/>
+        </p:spPr>
+        <p:txBody>
+          <a:bodyPr wrap="square" lIns="0" tIns="0" rIns="0" bIns="0" rtlCol="0" anchor="ctr"/>
+          <a:lstStyle/>
+          <a:p>
+            <a:pPr indent="0" marL="0">
+              <a:buNone/>
+            </a:pPr>
+            <a:r>
+              <a:rPr lang="en-US" sz="1100" b="1" dirty="0">
+                <a:solidFill>
+                  <a:srgbClr val="92400E"/>
+                </a:solidFill>
+                <a:latin typeface="Calibri" pitchFamily="34" charset="0"/>
+                <a:ea typeface="Calibri" pitchFamily="34" charset="-122"/>
+                <a:cs typeface="Calibri" pitchFamily="34" charset="-120"/>
+              </a:rPr>
+              <a:t>DA UTILIZZARE OGGI</a:t>
+            </a:r>
+            <a:pPr indent="0" marL="0">
+              <a:buNone/>
+            </a:pPr>
+            <a:r>
+              <a:rPr lang="en-US" sz="1100" dirty="0">
+                <a:solidFill>
+                  <a:srgbClr val="92400E"/>
+                </a:solidFill>
+                <a:latin typeface="Calibri" pitchFamily="34" charset="0"/>
+                <a:ea typeface="Calibri" pitchFamily="34" charset="-122"/>
+                <a:cs typeface="Calibri" pitchFamily="34" charset="-120"/>
+              </a:rPr>
+              <a:t> · il programma completo</a:t>
+            </a:r>
+            <a:endParaRPr lang="en-US" sz="1100" dirty="0"/>
+          </a:p>
+        </p:txBody>
+      </p:sp>
+      <p:sp>
+        <p:nvSpPr>
           <p:cNvPr id="25" name="Slide Number Placeholder 0"/>
           <p:cNvSpPr>
             <a:spLocks noGrp="1"/>
@@ -5951,6 +6991,158 @@
       </p:sp>
       <p:sp>
         <p:nvSpPr>
+          <p:cNvPr id="5" name="Shape 3"/>
+          <p:cNvSpPr/>
+          <p:nvPr/>
+        </p:nvSpPr>
+        <p:spPr>
+          <a:xfrm>
+            <a:off x="7941259" y="91440"/>
+            <a:ext cx="3701796" cy="274320"/>
+          </a:xfrm>
+          <a:prstGeom prst="rect">
+            <a:avLst/>
+          </a:prstGeom>
+          <a:solidFill>
+            <a:srgbClr val="FEF3C7"/>
+          </a:solidFill>
+          <a:ln w="12700">
+            <a:solidFill>
+              <a:srgbClr val="B45309"/>
+            </a:solidFill>
+            <a:prstDash val="solid"/>
+          </a:ln>
+        </p:spPr>
+      </p:sp>
+      <p:sp>
+        <p:nvSpPr>
+          <p:cNvPr id="6" name="Shape 4"/>
+          <p:cNvSpPr/>
+          <p:nvPr/>
+        </p:nvSpPr>
+        <p:spPr>
+          <a:xfrm>
+            <a:off x="7941259" y="91440"/>
+            <a:ext cx="27432" cy="274320"/>
+          </a:xfrm>
+          <a:prstGeom prst="rect">
+            <a:avLst/>
+          </a:prstGeom>
+          <a:solidFill>
+            <a:srgbClr val="B45309"/>
+          </a:solidFill>
+          <a:ln w="12700">
+            <a:solidFill>
+              <a:srgbClr val="B45309"/>
+            </a:solidFill>
+            <a:prstDash val="solid"/>
+          </a:ln>
+        </p:spPr>
+      </p:sp>
+      <p:sp>
+        <p:nvSpPr>
+          <p:cNvPr id="7" name="Shape 5"/>
+          <p:cNvSpPr/>
+          <p:nvPr/>
+        </p:nvSpPr>
+        <p:spPr>
+          <a:xfrm>
+            <a:off x="7996123" y="91440"/>
+            <a:ext cx="27432" cy="274320"/>
+          </a:xfrm>
+          <a:prstGeom prst="rect">
+            <a:avLst/>
+          </a:prstGeom>
+          <a:solidFill>
+            <a:srgbClr val="B45309"/>
+          </a:solidFill>
+          <a:ln w="12700">
+            <a:solidFill>
+              <a:srgbClr val="B45309"/>
+            </a:solidFill>
+            <a:prstDash val="solid"/>
+          </a:ln>
+        </p:spPr>
+      </p:sp>
+      <p:pic>
+        <p:nvPicPr>
+          <p:cNvPr id="8" name="Image 0" descr="preencoded.png">    </p:cNvPr>
+          <p:cNvPicPr>
+            <a:picLocks noChangeAspect="1"/>
+          </p:cNvPicPr>
+          <p:nvPr/>
+        </p:nvPicPr>
+        <p:blipFill>
+          <a:blip r:embed="rId1"/>
+          <a:stretch>
+            <a:fillRect/>
+          </a:stretch>
+        </p:blipFill>
+        <p:spPr>
+          <a:xfrm>
+            <a:off x="8069275" y="128016"/>
+            <a:ext cx="201168" cy="201168"/>
+          </a:xfrm>
+          <a:prstGeom prst="rect">
+            <a:avLst/>
+          </a:prstGeom>
+        </p:spPr>
+      </p:pic>
+      <p:sp>
+        <p:nvSpPr>
+          <p:cNvPr id="9" name="Text 6"/>
+          <p:cNvSpPr txBox="1"/>
+          <p:nvPr/>
+        </p:nvSpPr>
+        <p:spPr>
+          <a:xfrm>
+            <a:off x="8325307" y="91440"/>
+            <a:ext cx="3281172" cy="274320"/>
+          </a:xfrm>
+          <a:prstGeom prst="rect">
+            <a:avLst/>
+          </a:prstGeom>
+          <a:noFill/>
+          <a:ln/>
+        </p:spPr>
+        <p:txBody>
+          <a:bodyPr wrap="square" lIns="0" tIns="0" rIns="0" bIns="0" rtlCol="0" anchor="ctr"/>
+          <a:lstStyle/>
+          <a:p>
+            <a:pPr indent="0" marL="0">
+              <a:buNone/>
+            </a:pPr>
+            <a:r>
+              <a:rPr lang="en-US" sz="1100" b="1" dirty="0">
+                <a:solidFill>
+                  <a:srgbClr val="92400E"/>
+                </a:solidFill>
+                <a:latin typeface="Calibri" pitchFamily="34" charset="0"/>
+                <a:ea typeface="Calibri" pitchFamily="34" charset="-122"/>
+                <a:cs typeface="Calibri" pitchFamily="34" charset="-120"/>
+              </a:rPr>
+              <a:t>DA UTILIZZARE OGGI</a:t>
+            </a:r>
+            <a:pPr indent="0" marL="0">
+              <a:buNone/>
+            </a:pPr>
+            <a:r>
+              <a:rPr lang="en-US" sz="1100" dirty="0">
+                <a:solidFill>
+                  <a:srgbClr val="92400E"/>
+                </a:solidFill>
+                <a:latin typeface="Calibri" pitchFamily="34" charset="0"/>
+                <a:ea typeface="Calibri" pitchFamily="34" charset="-122"/>
+                <a:cs typeface="Calibri" pitchFamily="34" charset="-120"/>
+              </a:rPr>
+              <a:t> · il programma completo</a:t>
+            </a:r>
+            <a:endParaRPr lang="en-US" sz="1100" dirty="0"/>
+          </a:p>
+        </p:txBody>
+      </p:sp>
+      <p:sp>
+        <p:nvSpPr>
           <p:cNvPr id="25" name="Slide Number Placeholder 0"/>
           <p:cNvSpPr>
             <a:spLocks noGrp="1"/>
@@ -7104,6 +8296,158 @@
       </p:sp>
       <p:sp>
         <p:nvSpPr>
+          <p:cNvPr id="17" name="Shape 15"/>
+          <p:cNvSpPr/>
+          <p:nvPr/>
+        </p:nvSpPr>
+        <p:spPr>
+          <a:xfrm>
+            <a:off x="7875600" y="91440"/>
+            <a:ext cx="3767455" cy="274320"/>
+          </a:xfrm>
+          <a:prstGeom prst="rect">
+            <a:avLst/>
+          </a:prstGeom>
+          <a:solidFill>
+            <a:srgbClr val="FEF3C7"/>
+          </a:solidFill>
+          <a:ln w="12700">
+            <a:solidFill>
+              <a:srgbClr val="B45309"/>
+            </a:solidFill>
+            <a:prstDash val="solid"/>
+          </a:ln>
+        </p:spPr>
+      </p:sp>
+      <p:sp>
+        <p:nvSpPr>
+          <p:cNvPr id="18" name="Shape 16"/>
+          <p:cNvSpPr/>
+          <p:nvPr/>
+        </p:nvSpPr>
+        <p:spPr>
+          <a:xfrm>
+            <a:off x="7875600" y="91440"/>
+            <a:ext cx="27432" cy="274320"/>
+          </a:xfrm>
+          <a:prstGeom prst="rect">
+            <a:avLst/>
+          </a:prstGeom>
+          <a:solidFill>
+            <a:srgbClr val="B45309"/>
+          </a:solidFill>
+          <a:ln w="12700">
+            <a:solidFill>
+              <a:srgbClr val="B45309"/>
+            </a:solidFill>
+            <a:prstDash val="solid"/>
+          </a:ln>
+        </p:spPr>
+      </p:sp>
+      <p:sp>
+        <p:nvSpPr>
+          <p:cNvPr id="19" name="Shape 17"/>
+          <p:cNvSpPr/>
+          <p:nvPr/>
+        </p:nvSpPr>
+        <p:spPr>
+          <a:xfrm>
+            <a:off x="7930464" y="91440"/>
+            <a:ext cx="27432" cy="274320"/>
+          </a:xfrm>
+          <a:prstGeom prst="rect">
+            <a:avLst/>
+          </a:prstGeom>
+          <a:solidFill>
+            <a:srgbClr val="B45309"/>
+          </a:solidFill>
+          <a:ln w="12700">
+            <a:solidFill>
+              <a:srgbClr val="B45309"/>
+            </a:solidFill>
+            <a:prstDash val="solid"/>
+          </a:ln>
+        </p:spPr>
+      </p:sp>
+      <p:pic>
+        <p:nvPicPr>
+          <p:cNvPr id="20" name="Image 0" descr="preencoded.png">    </p:cNvPr>
+          <p:cNvPicPr>
+            <a:picLocks noChangeAspect="1"/>
+          </p:cNvPicPr>
+          <p:nvPr/>
+        </p:nvPicPr>
+        <p:blipFill>
+          <a:blip r:embed="rId1"/>
+          <a:stretch>
+            <a:fillRect/>
+          </a:stretch>
+        </p:blipFill>
+        <p:spPr>
+          <a:xfrm>
+            <a:off x="8003616" y="128016"/>
+            <a:ext cx="201168" cy="201168"/>
+          </a:xfrm>
+          <a:prstGeom prst="rect">
+            <a:avLst/>
+          </a:prstGeom>
+        </p:spPr>
+      </p:pic>
+      <p:sp>
+        <p:nvSpPr>
+          <p:cNvPr id="21" name="Text 18"/>
+          <p:cNvSpPr txBox="1"/>
+          <p:nvPr/>
+        </p:nvSpPr>
+        <p:spPr>
+          <a:xfrm>
+            <a:off x="8259648" y="91440"/>
+            <a:ext cx="3346831" cy="274320"/>
+          </a:xfrm>
+          <a:prstGeom prst="rect">
+            <a:avLst/>
+          </a:prstGeom>
+          <a:noFill/>
+          <a:ln/>
+        </p:spPr>
+        <p:txBody>
+          <a:bodyPr wrap="square" lIns="0" tIns="0" rIns="0" bIns="0" rtlCol="0" anchor="ctr"/>
+          <a:lstStyle/>
+          <a:p>
+            <a:pPr indent="0" marL="0">
+              <a:buNone/>
+            </a:pPr>
+            <a:r>
+              <a:rPr lang="en-US" sz="1100" b="1" dirty="0">
+                <a:solidFill>
+                  <a:srgbClr val="92400E"/>
+                </a:solidFill>
+                <a:latin typeface="Calibri" pitchFamily="34" charset="0"/>
+                <a:ea typeface="Calibri" pitchFamily="34" charset="-122"/>
+                <a:cs typeface="Calibri" pitchFamily="34" charset="-120"/>
+              </a:rPr>
+              <a:t>DA UTILIZZARE OGGI</a:t>
+            </a:r>
+            <a:pPr indent="0" marL="0">
+              <a:buNone/>
+            </a:pPr>
+            <a:r>
+              <a:rPr lang="en-US" sz="1100" dirty="0">
+                <a:solidFill>
+                  <a:srgbClr val="92400E"/>
+                </a:solidFill>
+                <a:latin typeface="Calibri" pitchFamily="34" charset="0"/>
+                <a:ea typeface="Calibri" pitchFamily="34" charset="-122"/>
+                <a:cs typeface="Calibri" pitchFamily="34" charset="-120"/>
+              </a:rPr>
+              <a:t> · gli strumenti di PRG32</a:t>
+            </a:r>
+            <a:endParaRPr lang="en-US" sz="1100" dirty="0"/>
+          </a:p>
+        </p:txBody>
+      </p:sp>
+      <p:sp>
+        <p:nvSpPr>
           <p:cNvPr id="25" name="Slide Number Placeholder 0"/>
           <p:cNvSpPr>
             <a:spLocks noGrp="1"/>
@@ -7940,6 +9284,158 @@
       </p:sp>
       <p:sp>
         <p:nvSpPr>
+          <p:cNvPr id="17" name="Shape 15"/>
+          <p:cNvSpPr/>
+          <p:nvPr/>
+        </p:nvSpPr>
+        <p:spPr>
+          <a:xfrm>
+            <a:off x="7875600" y="91440"/>
+            <a:ext cx="3767455" cy="274320"/>
+          </a:xfrm>
+          <a:prstGeom prst="rect">
+            <a:avLst/>
+          </a:prstGeom>
+          <a:solidFill>
+            <a:srgbClr val="FEF3C7"/>
+          </a:solidFill>
+          <a:ln w="12700">
+            <a:solidFill>
+              <a:srgbClr val="B45309"/>
+            </a:solidFill>
+            <a:prstDash val="solid"/>
+          </a:ln>
+        </p:spPr>
+      </p:sp>
+      <p:sp>
+        <p:nvSpPr>
+          <p:cNvPr id="18" name="Shape 16"/>
+          <p:cNvSpPr/>
+          <p:nvPr/>
+        </p:nvSpPr>
+        <p:spPr>
+          <a:xfrm>
+            <a:off x="7875600" y="91440"/>
+            <a:ext cx="27432" cy="274320"/>
+          </a:xfrm>
+          <a:prstGeom prst="rect">
+            <a:avLst/>
+          </a:prstGeom>
+          <a:solidFill>
+            <a:srgbClr val="B45309"/>
+          </a:solidFill>
+          <a:ln w="12700">
+            <a:solidFill>
+              <a:srgbClr val="B45309"/>
+            </a:solidFill>
+            <a:prstDash val="solid"/>
+          </a:ln>
+        </p:spPr>
+      </p:sp>
+      <p:sp>
+        <p:nvSpPr>
+          <p:cNvPr id="19" name="Shape 17"/>
+          <p:cNvSpPr/>
+          <p:nvPr/>
+        </p:nvSpPr>
+        <p:spPr>
+          <a:xfrm>
+            <a:off x="7930464" y="91440"/>
+            <a:ext cx="27432" cy="274320"/>
+          </a:xfrm>
+          <a:prstGeom prst="rect">
+            <a:avLst/>
+          </a:prstGeom>
+          <a:solidFill>
+            <a:srgbClr val="B45309"/>
+          </a:solidFill>
+          <a:ln w="12700">
+            <a:solidFill>
+              <a:srgbClr val="B45309"/>
+            </a:solidFill>
+            <a:prstDash val="solid"/>
+          </a:ln>
+        </p:spPr>
+      </p:sp>
+      <p:pic>
+        <p:nvPicPr>
+          <p:cNvPr id="20" name="Image 0" descr="preencoded.png">    </p:cNvPr>
+          <p:cNvPicPr>
+            <a:picLocks noChangeAspect="1"/>
+          </p:cNvPicPr>
+          <p:nvPr/>
+        </p:nvPicPr>
+        <p:blipFill>
+          <a:blip r:embed="rId1"/>
+          <a:stretch>
+            <a:fillRect/>
+          </a:stretch>
+        </p:blipFill>
+        <p:spPr>
+          <a:xfrm>
+            <a:off x="8003616" y="128016"/>
+            <a:ext cx="201168" cy="201168"/>
+          </a:xfrm>
+          <a:prstGeom prst="rect">
+            <a:avLst/>
+          </a:prstGeom>
+        </p:spPr>
+      </p:pic>
+      <p:sp>
+        <p:nvSpPr>
+          <p:cNvPr id="21" name="Text 18"/>
+          <p:cNvSpPr txBox="1"/>
+          <p:nvPr/>
+        </p:nvSpPr>
+        <p:spPr>
+          <a:xfrm>
+            <a:off x="8259648" y="91440"/>
+            <a:ext cx="3346831" cy="274320"/>
+          </a:xfrm>
+          <a:prstGeom prst="rect">
+            <a:avLst/>
+          </a:prstGeom>
+          <a:noFill/>
+          <a:ln/>
+        </p:spPr>
+        <p:txBody>
+          <a:bodyPr wrap="square" lIns="0" tIns="0" rIns="0" bIns="0" rtlCol="0" anchor="ctr"/>
+          <a:lstStyle/>
+          <a:p>
+            <a:pPr indent="0" marL="0">
+              <a:buNone/>
+            </a:pPr>
+            <a:r>
+              <a:rPr lang="en-US" sz="1100" b="1" dirty="0">
+                <a:solidFill>
+                  <a:srgbClr val="92400E"/>
+                </a:solidFill>
+                <a:latin typeface="Calibri" pitchFamily="34" charset="0"/>
+                <a:ea typeface="Calibri" pitchFamily="34" charset="-122"/>
+                <a:cs typeface="Calibri" pitchFamily="34" charset="-120"/>
+              </a:rPr>
+              <a:t>DA UTILIZZARE OGGI</a:t>
+            </a:r>
+            <a:pPr indent="0" marL="0">
+              <a:buNone/>
+            </a:pPr>
+            <a:r>
+              <a:rPr lang="en-US" sz="1100" dirty="0">
+                <a:solidFill>
+                  <a:srgbClr val="92400E"/>
+                </a:solidFill>
+                <a:latin typeface="Calibri" pitchFamily="34" charset="0"/>
+                <a:ea typeface="Calibri" pitchFamily="34" charset="-122"/>
+                <a:cs typeface="Calibri" pitchFamily="34" charset="-120"/>
+              </a:rPr>
+              <a:t> · gli strumenti di PRG32</a:t>
+            </a:r>
+            <a:endParaRPr lang="en-US" sz="1100" dirty="0"/>
+          </a:p>
+        </p:txBody>
+      </p:sp>
+      <p:sp>
+        <p:nvSpPr>
           <p:cNvPr id="25" name="Slide Number Placeholder 0"/>
           <p:cNvSpPr>
             <a:spLocks noGrp="1"/>
@@ -8769,6 +10265,158 @@
                 <a:cs typeface="Calibri" pitchFamily="34" charset="-120"/>
               </a:rPr>
               <a:t>Schermo nero: confrontate il cablaggio del display con il firmware</a:t>
+            </a:r>
+            <a:endParaRPr lang="en-US" sz="1100" dirty="0"/>
+          </a:p>
+        </p:txBody>
+      </p:sp>
+      <p:sp>
+        <p:nvSpPr>
+          <p:cNvPr id="17" name="Shape 15"/>
+          <p:cNvSpPr/>
+          <p:nvPr/>
+        </p:nvSpPr>
+        <p:spPr>
+          <a:xfrm>
+            <a:off x="7875600" y="91440"/>
+            <a:ext cx="3767455" cy="274320"/>
+          </a:xfrm>
+          <a:prstGeom prst="rect">
+            <a:avLst/>
+          </a:prstGeom>
+          <a:solidFill>
+            <a:srgbClr val="FEF3C7"/>
+          </a:solidFill>
+          <a:ln w="12700">
+            <a:solidFill>
+              <a:srgbClr val="B45309"/>
+            </a:solidFill>
+            <a:prstDash val="solid"/>
+          </a:ln>
+        </p:spPr>
+      </p:sp>
+      <p:sp>
+        <p:nvSpPr>
+          <p:cNvPr id="18" name="Shape 16"/>
+          <p:cNvSpPr/>
+          <p:nvPr/>
+        </p:nvSpPr>
+        <p:spPr>
+          <a:xfrm>
+            <a:off x="7875600" y="91440"/>
+            <a:ext cx="27432" cy="274320"/>
+          </a:xfrm>
+          <a:prstGeom prst="rect">
+            <a:avLst/>
+          </a:prstGeom>
+          <a:solidFill>
+            <a:srgbClr val="B45309"/>
+          </a:solidFill>
+          <a:ln w="12700">
+            <a:solidFill>
+              <a:srgbClr val="B45309"/>
+            </a:solidFill>
+            <a:prstDash val="solid"/>
+          </a:ln>
+        </p:spPr>
+      </p:sp>
+      <p:sp>
+        <p:nvSpPr>
+          <p:cNvPr id="19" name="Shape 17"/>
+          <p:cNvSpPr/>
+          <p:nvPr/>
+        </p:nvSpPr>
+        <p:spPr>
+          <a:xfrm>
+            <a:off x="7930464" y="91440"/>
+            <a:ext cx="27432" cy="274320"/>
+          </a:xfrm>
+          <a:prstGeom prst="rect">
+            <a:avLst/>
+          </a:prstGeom>
+          <a:solidFill>
+            <a:srgbClr val="B45309"/>
+          </a:solidFill>
+          <a:ln w="12700">
+            <a:solidFill>
+              <a:srgbClr val="B45309"/>
+            </a:solidFill>
+            <a:prstDash val="solid"/>
+          </a:ln>
+        </p:spPr>
+      </p:sp>
+      <p:pic>
+        <p:nvPicPr>
+          <p:cNvPr id="20" name="Image 0" descr="preencoded.png">    </p:cNvPr>
+          <p:cNvPicPr>
+            <a:picLocks noChangeAspect="1"/>
+          </p:cNvPicPr>
+          <p:nvPr/>
+        </p:nvPicPr>
+        <p:blipFill>
+          <a:blip r:embed="rId1"/>
+          <a:stretch>
+            <a:fillRect/>
+          </a:stretch>
+        </p:blipFill>
+        <p:spPr>
+          <a:xfrm>
+            <a:off x="8003616" y="128016"/>
+            <a:ext cx="201168" cy="201168"/>
+          </a:xfrm>
+          <a:prstGeom prst="rect">
+            <a:avLst/>
+          </a:prstGeom>
+        </p:spPr>
+      </p:pic>
+      <p:sp>
+        <p:nvSpPr>
+          <p:cNvPr id="21" name="Text 18"/>
+          <p:cNvSpPr txBox="1"/>
+          <p:nvPr/>
+        </p:nvSpPr>
+        <p:spPr>
+          <a:xfrm>
+            <a:off x="8259648" y="91440"/>
+            <a:ext cx="3346831" cy="274320"/>
+          </a:xfrm>
+          <a:prstGeom prst="rect">
+            <a:avLst/>
+          </a:prstGeom>
+          <a:noFill/>
+          <a:ln/>
+        </p:spPr>
+        <p:txBody>
+          <a:bodyPr wrap="square" lIns="0" tIns="0" rIns="0" bIns="0" rtlCol="0" anchor="ctr"/>
+          <a:lstStyle/>
+          <a:p>
+            <a:pPr indent="0" marL="0">
+              <a:buNone/>
+            </a:pPr>
+            <a:r>
+              <a:rPr lang="en-US" sz="1100" b="1" dirty="0">
+                <a:solidFill>
+                  <a:srgbClr val="92400E"/>
+                </a:solidFill>
+                <a:latin typeface="Calibri" pitchFamily="34" charset="0"/>
+                <a:ea typeface="Calibri" pitchFamily="34" charset="-122"/>
+                <a:cs typeface="Calibri" pitchFamily="34" charset="-120"/>
+              </a:rPr>
+              <a:t>DA UTILIZZARE OGGI</a:t>
+            </a:r>
+            <a:pPr indent="0" marL="0">
+              <a:buNone/>
+            </a:pPr>
+            <a:r>
+              <a:rPr lang="en-US" sz="1100" dirty="0">
+                <a:solidFill>
+                  <a:srgbClr val="92400E"/>
+                </a:solidFill>
+                <a:latin typeface="Calibri" pitchFamily="34" charset="0"/>
+                <a:ea typeface="Calibri" pitchFamily="34" charset="-122"/>
+                <a:cs typeface="Calibri" pitchFamily="34" charset="-120"/>
+              </a:rPr>
+              <a:t> · gli strumenti di PRG32</a:t>
             </a:r>
             <a:endParaRPr lang="en-US" sz="1100" dirty="0"/>
           </a:p>
@@ -10157,6 +11805,158 @@
       </p:graphicFrame>
       <p:sp>
         <p:nvSpPr>
+          <p:cNvPr id="4" name="Shape 1"/>
+          <p:cNvSpPr/>
+          <p:nvPr/>
+        </p:nvSpPr>
+        <p:spPr>
+          <a:xfrm>
+            <a:off x="7875600" y="91440"/>
+            <a:ext cx="3767455" cy="274320"/>
+          </a:xfrm>
+          <a:prstGeom prst="rect">
+            <a:avLst/>
+          </a:prstGeom>
+          <a:solidFill>
+            <a:srgbClr val="FEF3C7"/>
+          </a:solidFill>
+          <a:ln w="12700">
+            <a:solidFill>
+              <a:srgbClr val="B45309"/>
+            </a:solidFill>
+            <a:prstDash val="solid"/>
+          </a:ln>
+        </p:spPr>
+      </p:sp>
+      <p:sp>
+        <p:nvSpPr>
+          <p:cNvPr id="5" name="Shape 2"/>
+          <p:cNvSpPr/>
+          <p:nvPr/>
+        </p:nvSpPr>
+        <p:spPr>
+          <a:xfrm>
+            <a:off x="7875600" y="91440"/>
+            <a:ext cx="27432" cy="274320"/>
+          </a:xfrm>
+          <a:prstGeom prst="rect">
+            <a:avLst/>
+          </a:prstGeom>
+          <a:solidFill>
+            <a:srgbClr val="B45309"/>
+          </a:solidFill>
+          <a:ln w="12700">
+            <a:solidFill>
+              <a:srgbClr val="B45309"/>
+            </a:solidFill>
+            <a:prstDash val="solid"/>
+          </a:ln>
+        </p:spPr>
+      </p:sp>
+      <p:sp>
+        <p:nvSpPr>
+          <p:cNvPr id="6" name="Shape 3"/>
+          <p:cNvSpPr/>
+          <p:nvPr/>
+        </p:nvSpPr>
+        <p:spPr>
+          <a:xfrm>
+            <a:off x="7930464" y="91440"/>
+            <a:ext cx="27432" cy="274320"/>
+          </a:xfrm>
+          <a:prstGeom prst="rect">
+            <a:avLst/>
+          </a:prstGeom>
+          <a:solidFill>
+            <a:srgbClr val="B45309"/>
+          </a:solidFill>
+          <a:ln w="12700">
+            <a:solidFill>
+              <a:srgbClr val="B45309"/>
+            </a:solidFill>
+            <a:prstDash val="solid"/>
+          </a:ln>
+        </p:spPr>
+      </p:sp>
+      <p:pic>
+        <p:nvPicPr>
+          <p:cNvPr id="7" name="Image 0" descr="preencoded.png">    </p:cNvPr>
+          <p:cNvPicPr>
+            <a:picLocks noChangeAspect="1"/>
+          </p:cNvPicPr>
+          <p:nvPr/>
+        </p:nvPicPr>
+        <p:blipFill>
+          <a:blip r:embed="rId1"/>
+          <a:stretch>
+            <a:fillRect/>
+          </a:stretch>
+        </p:blipFill>
+        <p:spPr>
+          <a:xfrm>
+            <a:off x="8003616" y="128016"/>
+            <a:ext cx="201168" cy="201168"/>
+          </a:xfrm>
+          <a:prstGeom prst="rect">
+            <a:avLst/>
+          </a:prstGeom>
+        </p:spPr>
+      </p:pic>
+      <p:sp>
+        <p:nvSpPr>
+          <p:cNvPr id="8" name="Text 4"/>
+          <p:cNvSpPr txBox="1"/>
+          <p:nvPr/>
+        </p:nvSpPr>
+        <p:spPr>
+          <a:xfrm>
+            <a:off x="8259648" y="91440"/>
+            <a:ext cx="3346831" cy="274320"/>
+          </a:xfrm>
+          <a:prstGeom prst="rect">
+            <a:avLst/>
+          </a:prstGeom>
+          <a:noFill/>
+          <a:ln/>
+        </p:spPr>
+        <p:txBody>
+          <a:bodyPr wrap="square" lIns="0" tIns="0" rIns="0" bIns="0" rtlCol="0" anchor="ctr"/>
+          <a:lstStyle/>
+          <a:p>
+            <a:pPr indent="0" marL="0">
+              <a:buNone/>
+            </a:pPr>
+            <a:r>
+              <a:rPr lang="en-US" sz="1100" b="1" dirty="0">
+                <a:solidFill>
+                  <a:srgbClr val="92400E"/>
+                </a:solidFill>
+                <a:latin typeface="Calibri" pitchFamily="34" charset="0"/>
+                <a:ea typeface="Calibri" pitchFamily="34" charset="-122"/>
+                <a:cs typeface="Calibri" pitchFamily="34" charset="-120"/>
+              </a:rPr>
+              <a:t>DA UTILIZZARE OGGI</a:t>
+            </a:r>
+            <a:pPr indent="0" marL="0">
+              <a:buNone/>
+            </a:pPr>
+            <a:r>
+              <a:rPr lang="en-US" sz="1100" dirty="0">
+                <a:solidFill>
+                  <a:srgbClr val="92400E"/>
+                </a:solidFill>
+                <a:latin typeface="Calibri" pitchFamily="34" charset="0"/>
+                <a:ea typeface="Calibri" pitchFamily="34" charset="-122"/>
+                <a:cs typeface="Calibri" pitchFamily="34" charset="-120"/>
+              </a:rPr>
+              <a:t> · gli strumenti di PRG32</a:t>
+            </a:r>
+            <a:endParaRPr lang="en-US" sz="1100" dirty="0"/>
+          </a:p>
+        </p:txBody>
+      </p:sp>
+      <p:sp>
+        <p:nvSpPr>
           <p:cNvPr id="25" name="Slide Number Placeholder 0"/>
           <p:cNvSpPr>
             <a:spLocks noGrp="1"/>
@@ -12319,6 +14119,285 @@
       </p:sp>
       <p:sp>
         <p:nvSpPr>
+          <p:cNvPr id="17" name="Shape 15"/>
+          <p:cNvSpPr/>
+          <p:nvPr/>
+        </p:nvSpPr>
+        <p:spPr>
+          <a:xfrm>
+            <a:off x="7415987" y="91440"/>
+            <a:ext cx="4227068" cy="274320"/>
+          </a:xfrm>
+          <a:prstGeom prst="rect">
+            <a:avLst/>
+          </a:prstGeom>
+          <a:solidFill>
+            <a:srgbClr val="FEF3C7"/>
+          </a:solidFill>
+          <a:ln w="12700">
+            <a:solidFill>
+              <a:srgbClr val="B45309"/>
+            </a:solidFill>
+            <a:prstDash val="solid"/>
+          </a:ln>
+        </p:spPr>
+      </p:sp>
+      <p:sp>
+        <p:nvSpPr>
+          <p:cNvPr id="18" name="Shape 16"/>
+          <p:cNvSpPr/>
+          <p:nvPr/>
+        </p:nvSpPr>
+        <p:spPr>
+          <a:xfrm>
+            <a:off x="7415987" y="91440"/>
+            <a:ext cx="27432" cy="274320"/>
+          </a:xfrm>
+          <a:prstGeom prst="rect">
+            <a:avLst/>
+          </a:prstGeom>
+          <a:solidFill>
+            <a:srgbClr val="B45309"/>
+          </a:solidFill>
+          <a:ln w="12700">
+            <a:solidFill>
+              <a:srgbClr val="B45309"/>
+            </a:solidFill>
+            <a:prstDash val="solid"/>
+          </a:ln>
+        </p:spPr>
+      </p:sp>
+      <p:sp>
+        <p:nvSpPr>
+          <p:cNvPr id="19" name="Shape 17"/>
+          <p:cNvSpPr/>
+          <p:nvPr/>
+        </p:nvSpPr>
+        <p:spPr>
+          <a:xfrm>
+            <a:off x="7470851" y="91440"/>
+            <a:ext cx="27432" cy="274320"/>
+          </a:xfrm>
+          <a:prstGeom prst="rect">
+            <a:avLst/>
+          </a:prstGeom>
+          <a:solidFill>
+            <a:srgbClr val="B45309"/>
+          </a:solidFill>
+          <a:ln w="12700">
+            <a:solidFill>
+              <a:srgbClr val="B45309"/>
+            </a:solidFill>
+            <a:prstDash val="solid"/>
+          </a:ln>
+        </p:spPr>
+      </p:sp>
+      <p:pic>
+        <p:nvPicPr>
+          <p:cNvPr id="20" name="Image 0" descr="preencoded.png">    </p:cNvPr>
+          <p:cNvPicPr>
+            <a:picLocks noChangeAspect="1"/>
+          </p:cNvPicPr>
+          <p:nvPr/>
+        </p:nvPicPr>
+        <p:blipFill>
+          <a:blip r:embed="rId1"/>
+          <a:stretch>
+            <a:fillRect/>
+          </a:stretch>
+        </p:blipFill>
+        <p:spPr>
+          <a:xfrm>
+            <a:off x="7544003" y="128016"/>
+            <a:ext cx="201168" cy="201168"/>
+          </a:xfrm>
+          <a:prstGeom prst="rect">
+            <a:avLst/>
+          </a:prstGeom>
+        </p:spPr>
+      </p:pic>
+      <p:sp>
+        <p:nvSpPr>
+          <p:cNvPr id="21" name="Text 18"/>
+          <p:cNvSpPr txBox="1"/>
+          <p:nvPr/>
+        </p:nvSpPr>
+        <p:spPr>
+          <a:xfrm>
+            <a:off x="7800035" y="91440"/>
+            <a:ext cx="3806444" cy="274320"/>
+          </a:xfrm>
+          <a:prstGeom prst="rect">
+            <a:avLst/>
+          </a:prstGeom>
+          <a:noFill/>
+          <a:ln/>
+        </p:spPr>
+        <p:txBody>
+          <a:bodyPr wrap="square" lIns="0" tIns="0" rIns="0" bIns="0" rtlCol="0" anchor="ctr"/>
+          <a:lstStyle/>
+          <a:p>
+            <a:pPr indent="0" marL="0">
+              <a:buNone/>
+            </a:pPr>
+            <a:r>
+              <a:rPr lang="en-US" sz="1100" b="1" dirty="0">
+                <a:solidFill>
+                  <a:srgbClr val="92400E"/>
+                </a:solidFill>
+                <a:latin typeface="Calibri" pitchFamily="34" charset="0"/>
+                <a:ea typeface="Calibri" pitchFamily="34" charset="-122"/>
+                <a:cs typeface="Calibri" pitchFamily="34" charset="-120"/>
+              </a:rPr>
+              <a:t>DA UTILIZZARE OGGI</a:t>
+            </a:r>
+            <a:pPr indent="0" marL="0">
+              <a:buNone/>
+            </a:pPr>
+            <a:r>
+              <a:rPr lang="en-US" sz="1100" dirty="0">
+                <a:solidFill>
+                  <a:srgbClr val="92400E"/>
+                </a:solidFill>
+                <a:latin typeface="Calibri" pitchFamily="34" charset="0"/>
+                <a:ea typeface="Calibri" pitchFamily="34" charset="-122"/>
+                <a:cs typeface="Calibri" pitchFamily="34" charset="-120"/>
+              </a:rPr>
+              <a:t> · le chiamate del runtime PRG32</a:t>
+            </a:r>
+            <a:endParaRPr lang="en-US" sz="1100" dirty="0"/>
+          </a:p>
+        </p:txBody>
+      </p:sp>
+      <p:sp>
+        <p:nvSpPr>
+          <p:cNvPr id="22" name="Shape 19"/>
+          <p:cNvSpPr/>
+          <p:nvPr/>
+        </p:nvSpPr>
+        <p:spPr>
+          <a:xfrm>
+            <a:off x="3583508" y="91440"/>
+            <a:ext cx="3722751" cy="274320"/>
+          </a:xfrm>
+          <a:prstGeom prst="rect">
+            <a:avLst/>
+          </a:prstGeom>
+          <a:solidFill>
+            <a:srgbClr val="E0F2FE"/>
+          </a:solidFill>
+          <a:ln w="12700">
+            <a:solidFill>
+              <a:srgbClr val="0369A1"/>
+            </a:solidFill>
+            <a:prstDash val="solid"/>
+          </a:ln>
+        </p:spPr>
+      </p:sp>
+      <p:sp>
+        <p:nvSpPr>
+          <p:cNvPr id="23" name="Shape 20"/>
+          <p:cNvSpPr/>
+          <p:nvPr/>
+        </p:nvSpPr>
+        <p:spPr>
+          <a:xfrm>
+            <a:off x="3583508" y="91440"/>
+            <a:ext cx="73152" cy="274320"/>
+          </a:xfrm>
+          <a:prstGeom prst="rect">
+            <a:avLst/>
+          </a:prstGeom>
+          <a:solidFill>
+            <a:srgbClr val="0369A1"/>
+          </a:solidFill>
+          <a:ln w="12700">
+            <a:solidFill>
+              <a:srgbClr val="0369A1"/>
+            </a:solidFill>
+            <a:prstDash val="solid"/>
+          </a:ln>
+        </p:spPr>
+      </p:sp>
+      <p:pic>
+        <p:nvPicPr>
+          <p:cNvPr id="24" name="Image 1" descr="preencoded.png">    </p:cNvPr>
+          <p:cNvPicPr>
+            <a:picLocks noChangeAspect="1"/>
+          </p:cNvPicPr>
+          <p:nvPr/>
+        </p:nvPicPr>
+        <p:blipFill>
+          <a:blip r:embed="rId2"/>
+          <a:stretch>
+            <a:fillRect/>
+          </a:stretch>
+        </p:blipFill>
+        <p:spPr>
+          <a:xfrm>
+            <a:off x="3711524" y="128016"/>
+            <a:ext cx="201168" cy="201168"/>
+          </a:xfrm>
+          <a:prstGeom prst="rect">
+            <a:avLst/>
+          </a:prstGeom>
+        </p:spPr>
+      </p:pic>
+      <p:sp>
+        <p:nvSpPr>
+          <p:cNvPr id="25" name="Text 21"/>
+          <p:cNvSpPr txBox="1"/>
+          <p:nvPr/>
+        </p:nvSpPr>
+        <p:spPr>
+          <a:xfrm>
+            <a:off x="3967556" y="91440"/>
+            <a:ext cx="3302127" cy="274320"/>
+          </a:xfrm>
+          <a:prstGeom prst="rect">
+            <a:avLst/>
+          </a:prstGeom>
+          <a:noFill/>
+          <a:ln/>
+        </p:spPr>
+        <p:txBody>
+          <a:bodyPr wrap="square" lIns="0" tIns="0" rIns="0" bIns="0" rtlCol="0" anchor="ctr"/>
+          <a:lstStyle/>
+          <a:p>
+            <a:pPr indent="0" marL="0">
+              <a:buNone/>
+            </a:pPr>
+            <a:r>
+              <a:rPr lang="en-US" sz="1100" b="1" dirty="0">
+                <a:solidFill>
+                  <a:srgbClr val="075985"/>
+                </a:solidFill>
+                <a:latin typeface="Calibri" pitchFamily="34" charset="0"/>
+                <a:ea typeface="Calibri" pitchFamily="34" charset="-122"/>
+                <a:cs typeface="Calibri" pitchFamily="34" charset="-120"/>
+              </a:rPr>
+              <a:t>DA COMPRENDERE OGGI</a:t>
+            </a:r>
+            <a:pPr indent="0" marL="0">
+              <a:buNone/>
+            </a:pPr>
+            <a:r>
+              <a:rPr lang="en-US" sz="1100" dirty="0">
+                <a:solidFill>
+                  <a:srgbClr val="075985"/>
+                </a:solidFill>
+                <a:latin typeface="Calibri" pitchFamily="34" charset="0"/>
+                <a:ea typeface="Calibri" pitchFamily="34" charset="-122"/>
+                <a:cs typeface="Calibri" pitchFamily="34" charset="-120"/>
+              </a:rPr>
+              <a:t> · il complemento a due</a:t>
+            </a:r>
+            <a:endParaRPr lang="en-US" sz="1100" dirty="0"/>
+          </a:p>
+        </p:txBody>
+      </p:sp>
+      <p:sp>
+        <p:nvSpPr>
           <p:cNvPr id="25" name="Slide Number Placeholder 0"/>
           <p:cNvSpPr>
             <a:spLocks noGrp="1"/>
@@ -12980,6 +15059,133 @@
       </p:sp>
       <p:sp>
         <p:nvSpPr>
+          <p:cNvPr id="13" name="Shape 11"/>
+          <p:cNvSpPr/>
+          <p:nvPr/>
+        </p:nvSpPr>
+        <p:spPr>
+          <a:xfrm>
+            <a:off x="7526350" y="91440"/>
+            <a:ext cx="4116705" cy="274320"/>
+          </a:xfrm>
+          <a:prstGeom prst="rect">
+            <a:avLst/>
+          </a:prstGeom>
+          <a:solidFill>
+            <a:srgbClr val="E0F2FE"/>
+          </a:solidFill>
+          <a:ln w="12700">
+            <a:solidFill>
+              <a:srgbClr val="0369A1"/>
+            </a:solidFill>
+            <a:prstDash val="solid"/>
+          </a:ln>
+        </p:spPr>
+      </p:sp>
+      <p:sp>
+        <p:nvSpPr>
+          <p:cNvPr id="14" name="Shape 12"/>
+          <p:cNvSpPr/>
+          <p:nvPr/>
+        </p:nvSpPr>
+        <p:spPr>
+          <a:xfrm>
+            <a:off x="7526350" y="91440"/>
+            <a:ext cx="73152" cy="274320"/>
+          </a:xfrm>
+          <a:prstGeom prst="rect">
+            <a:avLst/>
+          </a:prstGeom>
+          <a:solidFill>
+            <a:srgbClr val="0369A1"/>
+          </a:solidFill>
+          <a:ln w="12700">
+            <a:solidFill>
+              <a:srgbClr val="0369A1"/>
+            </a:solidFill>
+            <a:prstDash val="solid"/>
+          </a:ln>
+        </p:spPr>
+      </p:sp>
+      <p:pic>
+        <p:nvPicPr>
+          <p:cNvPr id="15" name="Image 0" descr="preencoded.png">    </p:cNvPr>
+          <p:cNvPicPr>
+            <a:picLocks noChangeAspect="1"/>
+          </p:cNvPicPr>
+          <p:nvPr/>
+        </p:nvPicPr>
+        <p:blipFill>
+          <a:blip r:embed="rId1"/>
+          <a:stretch>
+            <a:fillRect/>
+          </a:stretch>
+        </p:blipFill>
+        <p:spPr>
+          <a:xfrm>
+            <a:off x="7654366" y="128016"/>
+            <a:ext cx="201168" cy="201168"/>
+          </a:xfrm>
+          <a:prstGeom prst="rect">
+            <a:avLst/>
+          </a:prstGeom>
+        </p:spPr>
+      </p:pic>
+      <p:sp>
+        <p:nvSpPr>
+          <p:cNvPr id="16" name="Text 13"/>
+          <p:cNvSpPr txBox="1"/>
+          <p:nvPr/>
+        </p:nvSpPr>
+        <p:spPr>
+          <a:xfrm>
+            <a:off x="7910398" y="91440"/>
+            <a:ext cx="3696081" cy="274320"/>
+          </a:xfrm>
+          <a:prstGeom prst="rect">
+            <a:avLst/>
+          </a:prstGeom>
+          <a:noFill/>
+          <a:ln/>
+        </p:spPr>
+        <p:txBody>
+          <a:bodyPr wrap="square" lIns="0" tIns="0" rIns="0" bIns="0" rtlCol="0" anchor="ctr"/>
+          <a:lstStyle/>
+          <a:p>
+            <a:pPr indent="0" marL="0">
+              <a:buNone/>
+            </a:pPr>
+            <a:r>
+              <a:rPr lang="en-US" sz="1100" b="1" dirty="0">
+                <a:solidFill>
+                  <a:srgbClr val="075985"/>
+                </a:solidFill>
+                <a:latin typeface="Calibri" pitchFamily="34" charset="0"/>
+                <a:ea typeface="Calibri" pitchFamily="34" charset="-122"/>
+                <a:cs typeface="Calibri" pitchFamily="34" charset="-120"/>
+              </a:rPr>
+              <a:t>DA COMPRENDERE OGGI</a:t>
+            </a:r>
+            <a:pPr indent="0" marL="0">
+              <a:buNone/>
+            </a:pPr>
+            <a:r>
+              <a:rPr lang="en-US" sz="1100" dirty="0">
+                <a:solidFill>
+                  <a:srgbClr val="075985"/>
+                </a:solidFill>
+                <a:latin typeface="Calibri" pitchFamily="34" charset="0"/>
+                <a:ea typeface="Calibri" pitchFamily="34" charset="-122"/>
+                <a:cs typeface="Calibri" pitchFamily="34" charset="-120"/>
+              </a:rPr>
+              <a:t> · shift come moltiplicazione</a:t>
+            </a:r>
+            <a:endParaRPr lang="en-US" sz="1100" dirty="0"/>
+          </a:p>
+        </p:txBody>
+      </p:sp>
+      <p:sp>
+        <p:nvSpPr>
           <p:cNvPr id="25" name="Slide Number Placeholder 0"/>
           <p:cNvSpPr>
             <a:spLocks noGrp="1"/>
@@ -13581,6 +15787,133 @@
       </p:sp>
       <p:sp>
         <p:nvSpPr>
+          <p:cNvPr id="13" name="Shape 11"/>
+          <p:cNvSpPr/>
+          <p:nvPr/>
+        </p:nvSpPr>
+        <p:spPr>
+          <a:xfrm>
+            <a:off x="7920304" y="91440"/>
+            <a:ext cx="3722751" cy="274320"/>
+          </a:xfrm>
+          <a:prstGeom prst="rect">
+            <a:avLst/>
+          </a:prstGeom>
+          <a:solidFill>
+            <a:srgbClr val="E0F2FE"/>
+          </a:solidFill>
+          <a:ln w="12700">
+            <a:solidFill>
+              <a:srgbClr val="0369A1"/>
+            </a:solidFill>
+            <a:prstDash val="solid"/>
+          </a:ln>
+        </p:spPr>
+      </p:sp>
+      <p:sp>
+        <p:nvSpPr>
+          <p:cNvPr id="14" name="Shape 12"/>
+          <p:cNvSpPr/>
+          <p:nvPr/>
+        </p:nvSpPr>
+        <p:spPr>
+          <a:xfrm>
+            <a:off x="7920304" y="91440"/>
+            <a:ext cx="73152" cy="274320"/>
+          </a:xfrm>
+          <a:prstGeom prst="rect">
+            <a:avLst/>
+          </a:prstGeom>
+          <a:solidFill>
+            <a:srgbClr val="0369A1"/>
+          </a:solidFill>
+          <a:ln w="12700">
+            <a:solidFill>
+              <a:srgbClr val="0369A1"/>
+            </a:solidFill>
+            <a:prstDash val="solid"/>
+          </a:ln>
+        </p:spPr>
+      </p:sp>
+      <p:pic>
+        <p:nvPicPr>
+          <p:cNvPr id="15" name="Image 0" descr="preencoded.png">    </p:cNvPr>
+          <p:cNvPicPr>
+            <a:picLocks noChangeAspect="1"/>
+          </p:cNvPicPr>
+          <p:nvPr/>
+        </p:nvPicPr>
+        <p:blipFill>
+          <a:blip r:embed="rId1"/>
+          <a:stretch>
+            <a:fillRect/>
+          </a:stretch>
+        </p:blipFill>
+        <p:spPr>
+          <a:xfrm>
+            <a:off x="8048320" y="128016"/>
+            <a:ext cx="201168" cy="201168"/>
+          </a:xfrm>
+          <a:prstGeom prst="rect">
+            <a:avLst/>
+          </a:prstGeom>
+        </p:spPr>
+      </p:pic>
+      <p:sp>
+        <p:nvSpPr>
+          <p:cNvPr id="16" name="Text 13"/>
+          <p:cNvSpPr txBox="1"/>
+          <p:nvPr/>
+        </p:nvSpPr>
+        <p:spPr>
+          <a:xfrm>
+            <a:off x="8304352" y="91440"/>
+            <a:ext cx="3302127" cy="274320"/>
+          </a:xfrm>
+          <a:prstGeom prst="rect">
+            <a:avLst/>
+          </a:prstGeom>
+          <a:noFill/>
+          <a:ln/>
+        </p:spPr>
+        <p:txBody>
+          <a:bodyPr wrap="square" lIns="0" tIns="0" rIns="0" bIns="0" rtlCol="0" anchor="ctr"/>
+          <a:lstStyle/>
+          <a:p>
+            <a:pPr indent="0" marL="0">
+              <a:buNone/>
+            </a:pPr>
+            <a:r>
+              <a:rPr lang="en-US" sz="1100" b="1" dirty="0">
+                <a:solidFill>
+                  <a:srgbClr val="075985"/>
+                </a:solidFill>
+                <a:latin typeface="Calibri" pitchFamily="34" charset="0"/>
+                <a:ea typeface="Calibri" pitchFamily="34" charset="-122"/>
+                <a:cs typeface="Calibri" pitchFamily="34" charset="-120"/>
+              </a:rPr>
+              <a:t>DA COMPRENDERE OGGI</a:t>
+            </a:r>
+            <a:pPr indent="0" marL="0">
+              <a:buNone/>
+            </a:pPr>
+            <a:r>
+              <a:rPr lang="en-US" sz="1100" dirty="0">
+                <a:solidFill>
+                  <a:srgbClr val="075985"/>
+                </a:solidFill>
+                <a:latin typeface="Calibri" pitchFamily="34" charset="0"/>
+                <a:ea typeface="Calibri" pitchFamily="34" charset="-122"/>
+                <a:cs typeface="Calibri" pitchFamily="34" charset="-120"/>
+              </a:rPr>
+              <a:t> · il complemento a due</a:t>
+            </a:r>
+            <a:endParaRPr lang="en-US" sz="1100" dirty="0"/>
+          </a:p>
+        </p:txBody>
+      </p:sp>
+      <p:sp>
+        <p:nvSpPr>
           <p:cNvPr id="25" name="Slide Number Placeholder 0"/>
           <p:cNvSpPr>
             <a:spLocks noGrp="1"/>
@@ -14108,6 +16441,133 @@
               <a:t>Laboratorio 06, passo 2: sette lampade per i bit dei pulsanti e un segnalino</a:t>
             </a:r>
             <a:endParaRPr lang="en-US" sz="1200" dirty="0"/>
+          </a:p>
+        </p:txBody>
+      </p:sp>
+      <p:sp>
+        <p:nvSpPr>
+          <p:cNvPr id="15" name="Shape 12"/>
+          <p:cNvSpPr/>
+          <p:nvPr/>
+        </p:nvSpPr>
+        <p:spPr>
+          <a:xfrm>
+            <a:off x="7395032" y="91440"/>
+            <a:ext cx="4248023" cy="274320"/>
+          </a:xfrm>
+          <a:prstGeom prst="rect">
+            <a:avLst/>
+          </a:prstGeom>
+          <a:solidFill>
+            <a:srgbClr val="E0F2FE"/>
+          </a:solidFill>
+          <a:ln w="12700">
+            <a:solidFill>
+              <a:srgbClr val="0369A1"/>
+            </a:solidFill>
+            <a:prstDash val="solid"/>
+          </a:ln>
+        </p:spPr>
+      </p:sp>
+      <p:sp>
+        <p:nvSpPr>
+          <p:cNvPr id="16" name="Shape 13"/>
+          <p:cNvSpPr/>
+          <p:nvPr/>
+        </p:nvSpPr>
+        <p:spPr>
+          <a:xfrm>
+            <a:off x="7395032" y="91440"/>
+            <a:ext cx="73152" cy="274320"/>
+          </a:xfrm>
+          <a:prstGeom prst="rect">
+            <a:avLst/>
+          </a:prstGeom>
+          <a:solidFill>
+            <a:srgbClr val="0369A1"/>
+          </a:solidFill>
+          <a:ln w="12700">
+            <a:solidFill>
+              <a:srgbClr val="0369A1"/>
+            </a:solidFill>
+            <a:prstDash val="solid"/>
+          </a:ln>
+        </p:spPr>
+      </p:sp>
+      <p:pic>
+        <p:nvPicPr>
+          <p:cNvPr id="17" name="Image 1" descr="preencoded.png">    </p:cNvPr>
+          <p:cNvPicPr>
+            <a:picLocks noChangeAspect="1"/>
+          </p:cNvPicPr>
+          <p:nvPr/>
+        </p:nvPicPr>
+        <p:blipFill>
+          <a:blip r:embed="rId2"/>
+          <a:stretch>
+            <a:fillRect/>
+          </a:stretch>
+        </p:blipFill>
+        <p:spPr>
+          <a:xfrm>
+            <a:off x="7523048" y="128016"/>
+            <a:ext cx="201168" cy="201168"/>
+          </a:xfrm>
+          <a:prstGeom prst="rect">
+            <a:avLst/>
+          </a:prstGeom>
+        </p:spPr>
+      </p:pic>
+      <p:sp>
+        <p:nvSpPr>
+          <p:cNvPr id="18" name="Text 14"/>
+          <p:cNvSpPr txBox="1"/>
+          <p:nvPr/>
+        </p:nvSpPr>
+        <p:spPr>
+          <a:xfrm>
+            <a:off x="7779080" y="91440"/>
+            <a:ext cx="3827399" cy="274320"/>
+          </a:xfrm>
+          <a:prstGeom prst="rect">
+            <a:avLst/>
+          </a:prstGeom>
+          <a:noFill/>
+          <a:ln/>
+        </p:spPr>
+        <p:txBody>
+          <a:bodyPr wrap="square" lIns="0" tIns="0" rIns="0" bIns="0" rtlCol="0" anchor="ctr"/>
+          <a:lstStyle/>
+          <a:p>
+            <a:pPr indent="0" marL="0">
+              <a:buNone/>
+            </a:pPr>
+            <a:r>
+              <a:rPr lang="en-US" sz="1100" b="1" dirty="0">
+                <a:solidFill>
+                  <a:srgbClr val="075985"/>
+                </a:solidFill>
+                <a:latin typeface="Calibri" pitchFamily="34" charset="0"/>
+                <a:ea typeface="Calibri" pitchFamily="34" charset="-122"/>
+                <a:cs typeface="Calibri" pitchFamily="34" charset="-120"/>
+              </a:rPr>
+              <a:t>DA COMPRENDERE OGGI</a:t>
+            </a:r>
+            <a:pPr indent="0" marL="0">
+              <a:buNone/>
+            </a:pPr>
+            <a:r>
+              <a:rPr lang="en-US" sz="1100" dirty="0">
+                <a:solidFill>
+                  <a:srgbClr val="075985"/>
+                </a:solidFill>
+                <a:latin typeface="Calibri" pitchFamily="34" charset="0"/>
+                <a:ea typeface="Calibri" pitchFamily="34" charset="-122"/>
+                <a:cs typeface="Calibri" pitchFamily="34" charset="-120"/>
+              </a:rPr>
+              <a:t> · istruzioni con o senza segno</a:t>
+            </a:r>
+            <a:endParaRPr lang="en-US" sz="1100" dirty="0"/>
           </a:p>
         </p:txBody>
       </p:sp>
@@ -16451,6 +18911,133 @@
       </p:graphicFrame>
       <p:sp>
         <p:nvSpPr>
+          <p:cNvPr id="4" name="Shape 1"/>
+          <p:cNvSpPr/>
+          <p:nvPr/>
+        </p:nvSpPr>
+        <p:spPr>
+          <a:xfrm>
+            <a:off x="7395032" y="91440"/>
+            <a:ext cx="4248023" cy="274320"/>
+          </a:xfrm>
+          <a:prstGeom prst="rect">
+            <a:avLst/>
+          </a:prstGeom>
+          <a:solidFill>
+            <a:srgbClr val="E0F2FE"/>
+          </a:solidFill>
+          <a:ln w="12700">
+            <a:solidFill>
+              <a:srgbClr val="0369A1"/>
+            </a:solidFill>
+            <a:prstDash val="solid"/>
+          </a:ln>
+        </p:spPr>
+      </p:sp>
+      <p:sp>
+        <p:nvSpPr>
+          <p:cNvPr id="5" name="Shape 2"/>
+          <p:cNvSpPr/>
+          <p:nvPr/>
+        </p:nvSpPr>
+        <p:spPr>
+          <a:xfrm>
+            <a:off x="7395032" y="91440"/>
+            <a:ext cx="73152" cy="274320"/>
+          </a:xfrm>
+          <a:prstGeom prst="rect">
+            <a:avLst/>
+          </a:prstGeom>
+          <a:solidFill>
+            <a:srgbClr val="0369A1"/>
+          </a:solidFill>
+          <a:ln w="12700">
+            <a:solidFill>
+              <a:srgbClr val="0369A1"/>
+            </a:solidFill>
+            <a:prstDash val="solid"/>
+          </a:ln>
+        </p:spPr>
+      </p:sp>
+      <p:pic>
+        <p:nvPicPr>
+          <p:cNvPr id="6" name="Image 0" descr="preencoded.png">    </p:cNvPr>
+          <p:cNvPicPr>
+            <a:picLocks noChangeAspect="1"/>
+          </p:cNvPicPr>
+          <p:nvPr/>
+        </p:nvPicPr>
+        <p:blipFill>
+          <a:blip r:embed="rId1"/>
+          <a:stretch>
+            <a:fillRect/>
+          </a:stretch>
+        </p:blipFill>
+        <p:spPr>
+          <a:xfrm>
+            <a:off x="7523048" y="128016"/>
+            <a:ext cx="201168" cy="201168"/>
+          </a:xfrm>
+          <a:prstGeom prst="rect">
+            <a:avLst/>
+          </a:prstGeom>
+        </p:spPr>
+      </p:pic>
+      <p:sp>
+        <p:nvSpPr>
+          <p:cNvPr id="7" name="Text 3"/>
+          <p:cNvSpPr txBox="1"/>
+          <p:nvPr/>
+        </p:nvSpPr>
+        <p:spPr>
+          <a:xfrm>
+            <a:off x="7779080" y="91440"/>
+            <a:ext cx="3827399" cy="274320"/>
+          </a:xfrm>
+          <a:prstGeom prst="rect">
+            <a:avLst/>
+          </a:prstGeom>
+          <a:noFill/>
+          <a:ln/>
+        </p:spPr>
+        <p:txBody>
+          <a:bodyPr wrap="square" lIns="0" tIns="0" rIns="0" bIns="0" rtlCol="0" anchor="ctr"/>
+          <a:lstStyle/>
+          <a:p>
+            <a:pPr indent="0" marL="0">
+              <a:buNone/>
+            </a:pPr>
+            <a:r>
+              <a:rPr lang="en-US" sz="1100" b="1" dirty="0">
+                <a:solidFill>
+                  <a:srgbClr val="075985"/>
+                </a:solidFill>
+                <a:latin typeface="Calibri" pitchFamily="34" charset="0"/>
+                <a:ea typeface="Calibri" pitchFamily="34" charset="-122"/>
+                <a:cs typeface="Calibri" pitchFamily="34" charset="-120"/>
+              </a:rPr>
+              <a:t>DA COMPRENDERE OGGI</a:t>
+            </a:r>
+            <a:pPr indent="0" marL="0">
+              <a:buNone/>
+            </a:pPr>
+            <a:r>
+              <a:rPr lang="en-US" sz="1100" dirty="0">
+                <a:solidFill>
+                  <a:srgbClr val="075985"/>
+                </a:solidFill>
+                <a:latin typeface="Calibri" pitchFamily="34" charset="0"/>
+                <a:ea typeface="Calibri" pitchFamily="34" charset="-122"/>
+                <a:cs typeface="Calibri" pitchFamily="34" charset="-120"/>
+              </a:rPr>
+              <a:t> · istruzioni con o senza segno</a:t>
+            </a:r>
+            <a:endParaRPr lang="en-US" sz="1100" dirty="0"/>
+          </a:p>
+        </p:txBody>
+      </p:sp>
+      <p:sp>
+        <p:nvSpPr>
           <p:cNvPr id="25" name="Slide Number Placeholder 0"/>
           <p:cNvSpPr>
             <a:spLocks noGrp="1"/>
@@ -17360,6 +19947,133 @@
       </p:sp>
       <p:sp>
         <p:nvSpPr>
+          <p:cNvPr id="17" name="Shape 15"/>
+          <p:cNvSpPr/>
+          <p:nvPr/>
+        </p:nvSpPr>
+        <p:spPr>
+          <a:xfrm>
+            <a:off x="7395032" y="91440"/>
+            <a:ext cx="4248023" cy="274320"/>
+          </a:xfrm>
+          <a:prstGeom prst="rect">
+            <a:avLst/>
+          </a:prstGeom>
+          <a:solidFill>
+            <a:srgbClr val="E0F2FE"/>
+          </a:solidFill>
+          <a:ln w="12700">
+            <a:solidFill>
+              <a:srgbClr val="0369A1"/>
+            </a:solidFill>
+            <a:prstDash val="solid"/>
+          </a:ln>
+        </p:spPr>
+      </p:sp>
+      <p:sp>
+        <p:nvSpPr>
+          <p:cNvPr id="18" name="Shape 16"/>
+          <p:cNvSpPr/>
+          <p:nvPr/>
+        </p:nvSpPr>
+        <p:spPr>
+          <a:xfrm>
+            <a:off x="7395032" y="91440"/>
+            <a:ext cx="73152" cy="274320"/>
+          </a:xfrm>
+          <a:prstGeom prst="rect">
+            <a:avLst/>
+          </a:prstGeom>
+          <a:solidFill>
+            <a:srgbClr val="0369A1"/>
+          </a:solidFill>
+          <a:ln w="12700">
+            <a:solidFill>
+              <a:srgbClr val="0369A1"/>
+            </a:solidFill>
+            <a:prstDash val="solid"/>
+          </a:ln>
+        </p:spPr>
+      </p:sp>
+      <p:pic>
+        <p:nvPicPr>
+          <p:cNvPr id="19" name="Image 0" descr="preencoded.png">    </p:cNvPr>
+          <p:cNvPicPr>
+            <a:picLocks noChangeAspect="1"/>
+          </p:cNvPicPr>
+          <p:nvPr/>
+        </p:nvPicPr>
+        <p:blipFill>
+          <a:blip r:embed="rId1"/>
+          <a:stretch>
+            <a:fillRect/>
+          </a:stretch>
+        </p:blipFill>
+        <p:spPr>
+          <a:xfrm>
+            <a:off x="7523048" y="128016"/>
+            <a:ext cx="201168" cy="201168"/>
+          </a:xfrm>
+          <a:prstGeom prst="rect">
+            <a:avLst/>
+          </a:prstGeom>
+        </p:spPr>
+      </p:pic>
+      <p:sp>
+        <p:nvSpPr>
+          <p:cNvPr id="20" name="Text 17"/>
+          <p:cNvSpPr txBox="1"/>
+          <p:nvPr/>
+        </p:nvSpPr>
+        <p:spPr>
+          <a:xfrm>
+            <a:off x="7779080" y="91440"/>
+            <a:ext cx="3827399" cy="274320"/>
+          </a:xfrm>
+          <a:prstGeom prst="rect">
+            <a:avLst/>
+          </a:prstGeom>
+          <a:noFill/>
+          <a:ln/>
+        </p:spPr>
+        <p:txBody>
+          <a:bodyPr wrap="square" lIns="0" tIns="0" rIns="0" bIns="0" rtlCol="0" anchor="ctr"/>
+          <a:lstStyle/>
+          <a:p>
+            <a:pPr indent="0" marL="0">
+              <a:buNone/>
+            </a:pPr>
+            <a:r>
+              <a:rPr lang="en-US" sz="1100" b="1" dirty="0">
+                <a:solidFill>
+                  <a:srgbClr val="075985"/>
+                </a:solidFill>
+                <a:latin typeface="Calibri" pitchFamily="34" charset="0"/>
+                <a:ea typeface="Calibri" pitchFamily="34" charset="-122"/>
+                <a:cs typeface="Calibri" pitchFamily="34" charset="-120"/>
+              </a:rPr>
+              <a:t>DA COMPRENDERE OGGI</a:t>
+            </a:r>
+            <a:pPr indent="0" marL="0">
+              <a:buNone/>
+            </a:pPr>
+            <a:r>
+              <a:rPr lang="en-US" sz="1100" dirty="0">
+                <a:solidFill>
+                  <a:srgbClr val="075985"/>
+                </a:solidFill>
+                <a:latin typeface="Calibri" pitchFamily="34" charset="0"/>
+                <a:ea typeface="Calibri" pitchFamily="34" charset="-122"/>
+                <a:cs typeface="Calibri" pitchFamily="34" charset="-120"/>
+              </a:rPr>
+              <a:t> · istruzioni con o senza segno</a:t>
+            </a:r>
+            <a:endParaRPr lang="en-US" sz="1100" dirty="0"/>
+          </a:p>
+        </p:txBody>
+      </p:sp>
+      <p:sp>
+        <p:nvSpPr>
           <p:cNvPr id="25" name="Slide Number Placeholder 0"/>
           <p:cNvSpPr>
             <a:spLocks noGrp="1"/>
@@ -18111,6 +20825,133 @@
               <a:t>Con segno: sommare un negativo deve rendere la somma minore; sommare un non negativo no</a:t>
             </a:r>
             <a:endParaRPr lang="en-US" sz="1600" dirty="0"/>
+          </a:p>
+        </p:txBody>
+      </p:sp>
+      <p:sp>
+        <p:nvSpPr>
+          <p:cNvPr id="14" name="Shape 12"/>
+          <p:cNvSpPr/>
+          <p:nvPr/>
+        </p:nvSpPr>
+        <p:spPr>
+          <a:xfrm>
+            <a:off x="7395032" y="91440"/>
+            <a:ext cx="4248023" cy="274320"/>
+          </a:xfrm>
+          <a:prstGeom prst="rect">
+            <a:avLst/>
+          </a:prstGeom>
+          <a:solidFill>
+            <a:srgbClr val="E0F2FE"/>
+          </a:solidFill>
+          <a:ln w="12700">
+            <a:solidFill>
+              <a:srgbClr val="0369A1"/>
+            </a:solidFill>
+            <a:prstDash val="solid"/>
+          </a:ln>
+        </p:spPr>
+      </p:sp>
+      <p:sp>
+        <p:nvSpPr>
+          <p:cNvPr id="15" name="Shape 13"/>
+          <p:cNvSpPr/>
+          <p:nvPr/>
+        </p:nvSpPr>
+        <p:spPr>
+          <a:xfrm>
+            <a:off x="7395032" y="91440"/>
+            <a:ext cx="73152" cy="274320"/>
+          </a:xfrm>
+          <a:prstGeom prst="rect">
+            <a:avLst/>
+          </a:prstGeom>
+          <a:solidFill>
+            <a:srgbClr val="0369A1"/>
+          </a:solidFill>
+          <a:ln w="12700">
+            <a:solidFill>
+              <a:srgbClr val="0369A1"/>
+            </a:solidFill>
+            <a:prstDash val="solid"/>
+          </a:ln>
+        </p:spPr>
+      </p:sp>
+      <p:pic>
+        <p:nvPicPr>
+          <p:cNvPr id="16" name="Image 0" descr="preencoded.png">    </p:cNvPr>
+          <p:cNvPicPr>
+            <a:picLocks noChangeAspect="1"/>
+          </p:cNvPicPr>
+          <p:nvPr/>
+        </p:nvPicPr>
+        <p:blipFill>
+          <a:blip r:embed="rId1"/>
+          <a:stretch>
+            <a:fillRect/>
+          </a:stretch>
+        </p:blipFill>
+        <p:spPr>
+          <a:xfrm>
+            <a:off x="7523048" y="128016"/>
+            <a:ext cx="201168" cy="201168"/>
+          </a:xfrm>
+          <a:prstGeom prst="rect">
+            <a:avLst/>
+          </a:prstGeom>
+        </p:spPr>
+      </p:pic>
+      <p:sp>
+        <p:nvSpPr>
+          <p:cNvPr id="17" name="Text 14"/>
+          <p:cNvSpPr txBox="1"/>
+          <p:nvPr/>
+        </p:nvSpPr>
+        <p:spPr>
+          <a:xfrm>
+            <a:off x="7779080" y="91440"/>
+            <a:ext cx="3827399" cy="274320"/>
+          </a:xfrm>
+          <a:prstGeom prst="rect">
+            <a:avLst/>
+          </a:prstGeom>
+          <a:noFill/>
+          <a:ln/>
+        </p:spPr>
+        <p:txBody>
+          <a:bodyPr wrap="square" lIns="0" tIns="0" rIns="0" bIns="0" rtlCol="0" anchor="ctr"/>
+          <a:lstStyle/>
+          <a:p>
+            <a:pPr indent="0" marL="0">
+              <a:buNone/>
+            </a:pPr>
+            <a:r>
+              <a:rPr lang="en-US" sz="1100" b="1" dirty="0">
+                <a:solidFill>
+                  <a:srgbClr val="075985"/>
+                </a:solidFill>
+                <a:latin typeface="Calibri" pitchFamily="34" charset="0"/>
+                <a:ea typeface="Calibri" pitchFamily="34" charset="-122"/>
+                <a:cs typeface="Calibri" pitchFamily="34" charset="-120"/>
+              </a:rPr>
+              <a:t>DA COMPRENDERE OGGI</a:t>
+            </a:r>
+            <a:pPr indent="0" marL="0">
+              <a:buNone/>
+            </a:pPr>
+            <a:r>
+              <a:rPr lang="en-US" sz="1100" dirty="0">
+                <a:solidFill>
+                  <a:srgbClr val="075985"/>
+                </a:solidFill>
+                <a:latin typeface="Calibri" pitchFamily="34" charset="0"/>
+                <a:ea typeface="Calibri" pitchFamily="34" charset="-122"/>
+                <a:cs typeface="Calibri" pitchFamily="34" charset="-120"/>
+              </a:rPr>
+              <a:t> · istruzioni con o senza segno</a:t>
+            </a:r>
+            <a:endParaRPr lang="en-US" sz="1100" dirty="0"/>
           </a:p>
         </p:txBody>
       </p:sp>

--- a/it/slides/05-Architettura_dei_Calcolatori-Rappresentazione_dei_Numeri_Interi-Codice.pptx
+++ b/it/slides/05-Architettura_dei_Calcolatori-Rappresentazione_dei_Numeri_Interi-Codice.pptx
@@ -126,28 +126,28 @@
   <p:extLst>
     <p:ext uri="{521415D9-36F7-43E2-AB2F-B90AF26B5E84}">
       <p14:sectionLst xmlns:p14="http://schemas.microsoft.com/office/powerpoint/2010/main">
-        <p14:section name="Apertura" id="{f9a8431e-e272-1d88-40b1-455df3bf65e2}">
+        <p14:section name="Apertura" id="{494467e6-551a-20f9-fd3d-1098adc9789b}">
           <p14:sldIdLst>
             <p14:sldId id="256"/>
             <p14:sldId id="257"/>
           </p14:sldIdLst>
         </p14:section>
-        <p14:section name="Riscaldamento sulla macchina" id="{405a7f0f-8476-9734-1b16-0459837ab76c}">
+        <p14:section name="Riscaldamento sulla macchina" id="{6fd99aa2-b8d4-754e-fdeb-595216f85153}">
           <p14:sldIdLst>
             <p14:sldId id="258"/>
           </p14:sldIdLst>
         </p14:section>
-        <p14:section name="Numeri naturali e overflow" id="{5f564b1c-20b3-ceed-e4ec-dc6c0e0ca142}">
+        <p14:section name="Numeri naturali e overflow" id="{7509a20e-160d-5caa-ccb5-7ce100d232ad}">
           <p14:sldIdLst>
             <p14:sldId id="259"/>
           </p14:sldIdLst>
         </p14:section>
-        <p14:section name="Interi con segno" id="{8afade24-b7a0-b86a-0cae-015ffb45cd14}">
+        <p14:section name="Interi con segno" id="{2b5f3f7d-7f76-c67c-89d8-e6a3652498f2}">
           <p14:sldIdLst>
             <p14:sldId id="260"/>
           </p14:sldIdLst>
         </p14:section>
-        <p14:section name="Ritorno alla macchina" id="{78d89fcf-0c55-a55e-24a3-99b2e3ad87a8}">
+        <p14:section name="Ritorno alla macchina" id="{6c61894d-bca1-f64f-c3d2-4af40c9d05fc}">
           <p14:sldIdLst>
             <p14:sldId id="261"/>
             <p14:sldId id="262"/>
@@ -155,7 +155,7 @@
             <p14:sldId id="264"/>
           </p14:sldIdLst>
         </p14:section>
-        <p14:section name="Il programma completo" id="{83793939-ad20-d931-557d-cf736fbdc9fb}">
+        <p14:section name="Il programma completo" id="{ecb77fd1-1565-e341-8777-6537f690ec57}">
           <p14:sldIdLst>
             <p14:sldId id="265"/>
             <p14:sldId id="266"/>
@@ -164,7 +164,7 @@
             <p14:sldId id="269"/>
           </p14:sldIdLst>
         </p14:section>
-        <p14:section name="Eseguire e provare" id="{40841137-4b6b-b083-1f7a-a15db861fe8e}">
+        <p14:section name="Eseguire e provare" id="{177dc7f2-189c-6d39-3bf0-7cdaba6d55be}">
           <p14:sldIdLst>
             <p14:sldId id="270"/>
             <p14:sldId id="271"/>
@@ -173,7 +173,7 @@
             <p14:sldId id="274"/>
           </p14:sldIdLst>
         </p14:section>
-        <p14:section name="Esercizi" id="{3b0d7e67-5a22-48cc-11c4-cb5cbfab4712}">
+        <p14:section name="Esercizi" id="{55897815-a79d-6276-9d55-9fc470830d5e}">
           <p14:sldIdLst>
             <p14:sldId id="275"/>
           </p14:sldIdLst>
